--- a/results/reports/report.pptx
+++ b/results/reports/report.pptx
@@ -3172,7 +3172,7 @@
               </a:defRPr>
             </a:pPr>
             <a:r>
-              <a:t>Research Intelligence Report • February 25, 2026</a:t>
+              <a:t>Research Intelligence Report • March 11, 2026</a:t>
             </a:r>
           </a:p>
         </p:txBody>
@@ -3323,7 +3323,7 @@
               </a:defRPr>
             </a:pPr>
             <a:r>
-              <a:t>   • arXiv: 2 papers</a:t>
+              <a:t>   • arXiv: 4 papers</a:t>
             </a:r>
           </a:p>
           <a:p>
@@ -3338,22 +3338,7 @@
               </a:defRPr>
             </a:pPr>
             <a:r>
-              <a:t>   • NeurIPS: 1 papers</a:t>
-            </a:r>
-          </a:p>
-          <a:p>
-            <a:pPr>
-              <a:spcBef>
-                <a:spcPts val="600"/>
-              </a:spcBef>
-              <a:defRPr sz="1800">
-                <a:solidFill>
-                  <a:srgbClr val="2D3748"/>
-                </a:solidFill>
-              </a:defRPr>
-            </a:pPr>
-            <a:r>
-              <a:t>   • ICLR: 1 papers</a:t>
+              <a:t>   • Papers with Code: 2 papers</a:t>
             </a:r>
           </a:p>
           <a:p>
@@ -3471,7 +3456,7 @@
               </a:defRPr>
             </a:pPr>
             <a:r>
-              <a:t>Reference Resources</a:t>
+              <a:t>Sources (6 total)</a:t>
             </a:r>
           </a:p>
         </p:txBody>
@@ -3501,8 +3486,8 @@
         </p:nvSpPr>
         <p:spPr>
           <a:xfrm>
-            <a:off x="457200" y="1645920"/>
-            <a:ext cx="8229600" cy="4572000"/>
+            <a:off x="457200" y="1371600"/>
+            <a:ext cx="4114800" cy="5029200"/>
           </a:xfrm>
           <a:prstGeom prst="rect">
             <a:avLst/>
@@ -3517,91 +3502,114 @@
           <a:p>
             <a:pPr>
               <a:spcBef>
-                <a:spcPts val="600"/>
-              </a:spcBef>
-              <a:defRPr sz="1400">
-                <a:solidFill>
-                  <a:srgbClr val="2D3748"/>
-                </a:solidFill>
-              </a:defRPr>
-            </a:pPr>
-            <a:r>
-              <a:t>1. Neural Architecture Search for Edge Devices (ICLR) - 95/100</a:t>
-            </a:r>
-          </a:p>
-          <a:p>
-            <a:pPr>
-              <a:spcBef>
-                <a:spcPts val="600"/>
-              </a:spcBef>
-              <a:defRPr sz="1400">
-                <a:solidFill>
-                  <a:srgbClr val="2D3748"/>
-                </a:solidFill>
-              </a:defRPr>
-            </a:pPr>
-            <a:r>
-              <a:t>2. Hardware-Aware Model Compression Techniques (arXiv) - 95/100</a:t>
-            </a:r>
-          </a:p>
-          <a:p>
-            <a:pPr>
-              <a:spcBef>
-                <a:spcPts val="600"/>
-              </a:spcBef>
-              <a:defRPr sz="1400">
-                <a:solidFill>
-                  <a:srgbClr val="2D3748"/>
-                </a:solidFill>
-              </a:defRPr>
-            </a:pPr>
-            <a:r>
-              <a:t>3. DRAM Bandwidth Optimization on Mobile Platforms (NeurIPS) - 90/100</a:t>
-            </a:r>
-          </a:p>
-          <a:p>
-            <a:pPr>
-              <a:spcBef>
-                <a:spcPts val="600"/>
-              </a:spcBef>
-              <a:defRPr sz="1400">
-                <a:solidFill>
-                  <a:srgbClr val="2D3748"/>
-                </a:solidFill>
-              </a:defRPr>
-            </a:pPr>
-            <a:r>
-              <a:t>4. Memory-Efficient Attention Mechanisms (Google Scholar) - 90/100</a:t>
-            </a:r>
-          </a:p>
-          <a:p>
-            <a:pPr>
-              <a:spcBef>
-                <a:spcPts val="600"/>
-              </a:spcBef>
-              <a:defRPr sz="1400">
-                <a:solidFill>
-                  <a:srgbClr val="2D3748"/>
-                </a:solidFill>
-              </a:defRPr>
-            </a:pPr>
-            <a:r>
-              <a:t>5. Efficient Quantization for On-Device Neural Networks (arXiv) - 85/100</a:t>
-            </a:r>
-          </a:p>
-          <a:p>
-            <a:pPr>
-              <a:spcBef>
-                <a:spcPts val="600"/>
-              </a:spcBef>
-              <a:defRPr sz="1400">
-                <a:solidFill>
-                  <a:srgbClr val="2D3748"/>
-                </a:solidFill>
-              </a:defRPr>
-            </a:pPr>
-            <a:r>
-              <a:t>6. Mixed-Precision Inference for LLMs (ICML) - 85/100</a:t>
+                <a:spcPts val="400"/>
+              </a:spcBef>
+              <a:defRPr sz="1100">
+                <a:solidFill>
+                  <a:srgbClr val="2D3748"/>
+                </a:solidFill>
+              </a:defRPr>
+            </a:pPr>
+            <a:r>
+              <a:t>1. INT8 Quantization: Achieving 4x Model Compres (arXiv) - 1</a:t>
+            </a:r>
+          </a:p>
+          <a:p>
+            <a:pPr>
+              <a:spcBef>
+                <a:spcPts val="400"/>
+              </a:spcBef>
+              <a:defRPr sz="1100">
+                <a:solidFill>
+                  <a:srgbClr val="2D3748"/>
+                </a:solidFill>
+              </a:defRPr>
+            </a:pPr>
+            <a:r>
+              <a:t>2. On-Device LLM Inference: Techniques and Trade (Papers with Code) - 1</a:t>
+            </a:r>
+          </a:p>
+          <a:p>
+            <a:pPr>
+              <a:spcBef>
+                <a:spcPts val="400"/>
+              </a:spcBef>
+              <a:defRPr sz="1100">
+                <a:solidFill>
+                  <a:srgbClr val="2D3748"/>
+                </a:solidFill>
+              </a:defRPr>
+            </a:pPr>
+            <a:r>
+              <a:t>3. Structured Pruning for Edge AI: A Comprehensi (arXiv) - 1</a:t>
+            </a:r>
+          </a:p>
+        </p:txBody>
+      </p:sp>
+      <p:sp>
+        <p:nvSpPr>
+          <p:cNvPr id="5" name="TextBox 4"/>
+          <p:cNvSpPr txBox="1"/>
+          <p:nvPr/>
+        </p:nvSpPr>
+        <p:spPr>
+          <a:xfrm>
+            <a:off x="4754880" y="1371600"/>
+            <a:ext cx="4114800" cy="5029200"/>
+          </a:xfrm>
+          <a:prstGeom prst="rect">
+            <a:avLst/>
+          </a:prstGeom>
+          <a:noFill/>
+        </p:spPr>
+        <p:txBody>
+          <a:bodyPr wrap="square">
+            <a:spAutoFit/>
+          </a:bodyPr>
+          <a:lstStyle/>
+          <a:p>
+            <a:pPr>
+              <a:spcBef>
+                <a:spcPts val="400"/>
+              </a:spcBef>
+              <a:defRPr sz="1100">
+                <a:solidFill>
+                  <a:srgbClr val="2D3748"/>
+                </a:solidFill>
+              </a:defRPr>
+            </a:pPr>
+            <a:r>
+              <a:t>4. Knowledge Distillation for Efficient Mobile M (Papers with Code) - 1</a:t>
+            </a:r>
+          </a:p>
+          <a:p>
+            <a:pPr>
+              <a:spcBef>
+                <a:spcPts val="400"/>
+              </a:spcBef>
+              <a:defRPr sz="1100">
+                <a:solidFill>
+                  <a:srgbClr val="2D3748"/>
+                </a:solidFill>
+              </a:defRPr>
+            </a:pPr>
+            <a:r>
+              <a:t>5. Mixed Precision Training for Efficient Infere (arXiv) - 1</a:t>
+            </a:r>
+          </a:p>
+          <a:p>
+            <a:pPr>
+              <a:spcBef>
+                <a:spcPts val="400"/>
+              </a:spcBef>
+              <a:defRPr sz="1100">
+                <a:solidFill>
+                  <a:srgbClr val="2D3748"/>
+                </a:solidFill>
+              </a:defRPr>
+            </a:pPr>
+            <a:r>
+              <a:t>6. Neural Architecture Search for Efficient Mobi (arXiv) - 1</a:t>
             </a:r>
           </a:p>
         </p:txBody>
@@ -3861,7 +3869,7 @@
               </a:defRPr>
             </a:pPr>
             <a:r>
-              <a:t>⭐ Average Score: 90.0/100</a:t>
+              <a:t>⭐ Average Score: 0.9/100</a:t>
             </a:r>
           </a:p>
           <a:p>
@@ -3876,7 +3884,7 @@
               </a:defRPr>
             </a:pPr>
             <a:r>
-              <a:t>📱 Mobile Papers: 2</a:t>
+              <a:t>📱 Mobile Papers: 4</a:t>
             </a:r>
           </a:p>
           <a:p>
@@ -3891,7 +3899,7 @@
               </a:defRPr>
             </a:pPr>
             <a:r>
-              <a:t>💻 Laptop Papers: 2</a:t>
+              <a:t>💻 Laptop Papers: 1</a:t>
             </a:r>
           </a:p>
           <a:p>
@@ -4022,7 +4030,7 @@
               </a:defRPr>
             </a:pPr>
             <a:r>
-              <a:t>   • Int8 Quantization: 1 papers</a:t>
+              <a:t>   • INT8: 1 papers</a:t>
             </a:r>
           </a:p>
           <a:p>
@@ -4037,7 +4045,7 @@
               </a:defRPr>
             </a:pPr>
             <a:r>
-              <a:t>   • Mixed-Precision (Int4/Int8): 1 papers</a:t>
+              <a:t>   • Pruning: 1 papers</a:t>
             </a:r>
           </a:p>
           <a:p>
@@ -4052,7 +4060,7 @@
               </a:defRPr>
             </a:pPr>
             <a:r>
-              <a:t>   • Dynamic Quantization: 1 papers</a:t>
+              <a:t>   • Distillation: 1 papers</a:t>
             </a:r>
           </a:p>
           <a:p>
@@ -4170,7 +4178,7 @@
               </a:defRPr>
             </a:pPr>
             <a:r>
-              <a:t>#1: Neural Architecture Search for Edge Devices</a:t>
+              <a:t>#1: INT8 Quantization: Achieving 4x Model Compression</a:t>
             </a:r>
           </a:p>
         </p:txBody>
@@ -4225,7 +4233,7 @@
               </a:defRPr>
             </a:pPr>
             <a:r>
-              <a:t>Score: 95/100 | Platform: IoT | Model: Transformer</a:t>
+              <a:t>Score: 0.98/100 | Platform: Mobile | Model: Transformer</a:t>
             </a:r>
           </a:p>
           <a:p>
@@ -4240,7 +4248,7 @@
               </a:defRPr>
             </a:pPr>
             <a:r>
-              <a:t>DRAM Impact: Low</a:t>
+              <a:t>DRAM Impact: High</a:t>
             </a:r>
           </a:p>
           <a:p>
@@ -4282,7 +4290,7 @@
               </a:defRPr>
             </a:pPr>
             <a:r>
-              <a:t>Paper 3: Demonstrates Dynamic Quantization achieving 3.2x reduction in model size while maintaining inference speed within 5% of baseline.</a:t>
+              <a:t>INT8 reduces DRAM bandwidth by 75% with minimal accuracy loss</a:t>
             </a:r>
           </a:p>
           <a:p>
@@ -4324,7 +4332,7 @@
               </a:defRPr>
             </a:pPr>
             <a:r>
-              <a:t>Implement Dynamic Quantization in production systems. Consider calibration dataset size and quantization granularity for optimal performance.</a:t>
+              <a:t>Implement INT8 quantization in production for 4x speedup</a:t>
             </a:r>
           </a:p>
         </p:txBody>
@@ -4370,7 +4378,7 @@
               </a:defRPr>
             </a:pPr>
             <a:r>
-              <a:t>#2: Hardware-Aware Model Compression Techniques</a:t>
+              <a:t>#2: On-Device LLM Inference: Techniques and Trade-offs</a:t>
             </a:r>
           </a:p>
         </p:txBody>
@@ -4425,7 +4433,7 @@
               </a:defRPr>
             </a:pPr>
             <a:r>
-              <a:t>Score: 95/100 | Platform: IoT | Model: CNN</a:t>
+              <a:t>Score: 0.95/100 | Platform: Mobile | Model: LLM</a:t>
             </a:r>
           </a:p>
           <a:p>
@@ -4440,7 +4448,7 @@
               </a:defRPr>
             </a:pPr>
             <a:r>
-              <a:t>DRAM Impact: Low</a:t>
+              <a:t>DRAM Impact: High</a:t>
             </a:r>
           </a:p>
           <a:p>
@@ -4482,7 +4490,7 @@
               </a:defRPr>
             </a:pPr>
             <a:r>
-              <a:t>Paper 6: Demonstrates Differentiable Quantization achieving 3.2x reduction in model size while maintaining inference speed within 5% of baseline.</a:t>
+              <a:t>Batching and caching reduce latency</a:t>
             </a:r>
           </a:p>
           <a:p>
@@ -4524,7 +4532,7 @@
               </a:defRPr>
             </a:pPr>
             <a:r>
-              <a:t>Implement Differentiable Quantization in production systems. Consider calibration dataset size and quantization granularity for optimal performance.</a:t>
+              <a:t>Implement aggressive batching and KV caching</a:t>
             </a:r>
           </a:p>
         </p:txBody>
@@ -4570,7 +4578,7 @@
               </a:defRPr>
             </a:pPr>
             <a:r>
-              <a:t>#3: DRAM Bandwidth Optimization on Mobile Platforms</a:t>
+              <a:t>#3: Structured Pruning for Edge AI: A Comprehensive St</a:t>
             </a:r>
           </a:p>
         </p:txBody>
@@ -4625,7 +4633,7 @@
               </a:defRPr>
             </a:pPr>
             <a:r>
-              <a:t>Score: 90/100 | Platform: Laptop | Model: CNN</a:t>
+              <a:t>Score: 0.92/100 | Platform: Edge | Model: CNN</a:t>
             </a:r>
           </a:p>
           <a:p>
@@ -4682,7 +4690,7 @@
               </a:defRPr>
             </a:pPr>
             <a:r>
-              <a:t>Paper 2: Demonstrates Mixed-Precision (Int4/Int8) achieving 3.2x reduction in model size while maintaining inference speed within 5% of baseline.</a:t>
+              <a:t>Achieve 50% sparsity with structured pruning</a:t>
             </a:r>
           </a:p>
           <a:p>
@@ -4724,7 +4732,7 @@
               </a:defRPr>
             </a:pPr>
             <a:r>
-              <a:t>Implement Mixed-Precision (Int4/Int8) in production systems. Consider calibration dataset size and quantization granularity for optimal performance.</a:t>
+              <a:t>Use fine-grained structured pruning for mobile</a:t>
             </a:r>
           </a:p>
         </p:txBody>
@@ -4770,7 +4778,7 @@
               </a:defRPr>
             </a:pPr>
             <a:r>
-              <a:t>#4: Memory-Efficient Attention Mechanisms</a:t>
+              <a:t>#4: Knowledge Distillation for Efficient Mobile Models</a:t>
             </a:r>
           </a:p>
         </p:txBody>
@@ -4825,7 +4833,7 @@
               </a:defRPr>
             </a:pPr>
             <a:r>
-              <a:t>Score: 90/100 | Platform: Laptop | Model: Transformer</a:t>
+              <a:t>Score: 0.89/100 | Platform: Mobile | Model: BERT</a:t>
             </a:r>
           </a:p>
           <a:p>
@@ -4840,7 +4848,7 @@
               </a:defRPr>
             </a:pPr>
             <a:r>
-              <a:t>DRAM Impact: Medium</a:t>
+              <a:t>DRAM Impact: Low</a:t>
             </a:r>
           </a:p>
           <a:p>
@@ -4882,7 +4890,7 @@
               </a:defRPr>
             </a:pPr>
             <a:r>
-              <a:t>Paper 5: Demonstrates Pruning with Quantization achieving 3.2x reduction in model size while maintaining inference speed within 5% of baseline.</a:t>
+              <a:t>Student models 6x smaller than teacher</a:t>
             </a:r>
           </a:p>
           <a:p>
@@ -4924,7 +4932,7 @@
               </a:defRPr>
             </a:pPr>
             <a:r>
-              <a:t>Implement Pruning with Quantization in production systems. Consider calibration dataset size and quantization granularity for optimal performance.</a:t>
+              <a:t>Implement knowledge distillation pipeline</a:t>
             </a:r>
           </a:p>
         </p:txBody>
@@ -4970,7 +4978,7 @@
               </a:defRPr>
             </a:pPr>
             <a:r>
-              <a:t>#5: Efficient Quantization for On-Device Neural Networ</a:t>
+              <a:t>#5: Mixed Precision Training for Efficient Inference</a:t>
             </a:r>
           </a:p>
         </p:txBody>
@@ -5025,7 +5033,7 @@
               </a:defRPr>
             </a:pPr>
             <a:r>
-              <a:t>Score: 85/100 | Platform: Mobile | Model: Transformer</a:t>
+              <a:t>Score: 0.88/100 | Platform: Laptop | Model: ResNet</a:t>
             </a:r>
           </a:p>
           <a:p>
@@ -5040,7 +5048,7 @@
               </a:defRPr>
             </a:pPr>
             <a:r>
-              <a:t>DRAM Impact: High</a:t>
+              <a:t>DRAM Impact: Medium</a:t>
             </a:r>
           </a:p>
           <a:p>
@@ -5082,7 +5090,7 @@
               </a:defRPr>
             </a:pPr>
             <a:r>
-              <a:t>Paper 1: Demonstrates Int8 Quantization achieving 3.2x reduction in model size while maintaining inference speed within 5% of baseline.</a:t>
+              <a:t>Mixed precision reduces memory by 40%</a:t>
             </a:r>
           </a:p>
           <a:p>
@@ -5124,7 +5132,7 @@
               </a:defRPr>
             </a:pPr>
             <a:r>
-              <a:t>Implement Int8 Quantization in production systems. Consider calibration dataset size and quantization granularity for optimal performance.</a:t>
+              <a:t>Use mixed precision for training and inference</a:t>
             </a:r>
           </a:p>
         </p:txBody>
@@ -5170,7 +5178,7 @@
               </a:defRPr>
             </a:pPr>
             <a:r>
-              <a:t>#6: Mixed-Precision Inference for LLMs</a:t>
+              <a:t>#6: Neural Architecture Search for Efficient Mobile Mo</a:t>
             </a:r>
           </a:p>
         </p:txBody>
@@ -5225,7 +5233,7 @@
               </a:defRPr>
             </a:pPr>
             <a:r>
-              <a:t>Score: 85/100 | Platform: Mobile | Model: CNN</a:t>
+              <a:t>Score: 0.86/100 | Platform: Mobile | Model: MobileNet</a:t>
             </a:r>
           </a:p>
           <a:p>
@@ -5240,7 +5248,7 @@
               </a:defRPr>
             </a:pPr>
             <a:r>
-              <a:t>DRAM Impact: High</a:t>
+              <a:t>DRAM Impact: Medium</a:t>
             </a:r>
           </a:p>
           <a:p>
@@ -5282,7 +5290,7 @@
               </a:defRPr>
             </a:pPr>
             <a:r>
-              <a:t>Paper 4: Demonstrates Knowledge Distillation achieving 3.2x reduction in model size while maintaining inference speed within 5% of baseline.</a:t>
+              <a:t>NAS finds models 40% smaller automatically</a:t>
             </a:r>
           </a:p>
           <a:p>
@@ -5324,7 +5332,7 @@
               </a:defRPr>
             </a:pPr>
             <a:r>
-              <a:t>Implement Knowledge Distillation in production systems. Consider calibration dataset size and quantization granularity for optimal performance.</a:t>
+              <a:t>Deploy NAS-discovered architectures</a:t>
             </a:r>
           </a:p>
         </p:txBody>

--- a/results/reports/report.pptx
+++ b/results/reports/report.pptx
@@ -14,9 +14,6 @@
     <p:sldId id="262" r:id="rId13"/>
     <p:sldId id="263" r:id="rId14"/>
     <p:sldId id="264" r:id="rId15"/>
-    <p:sldId id="265" r:id="rId16"/>
-    <p:sldId id="266" r:id="rId17"/>
-    <p:sldId id="267" r:id="rId18"/>
   </p:sldIdLst>
   <p:sldSz cx="9144000" cy="6858000" type="screen4x3"/>
   <p:notesSz cx="6858000" cy="9144000"/>
@@ -3207,553 +3204,7 @@
               </a:defRPr>
             </a:pPr>
             <a:r>
-              <a:t>6 Papers Analyzed • Hybrid RAG + Multi-Model AI</a:t>
-            </a:r>
-          </a:p>
-        </p:txBody>
-      </p:sp>
-    </p:spTree>
-  </p:cSld>
-  <p:clrMapOvr>
-    <a:masterClrMapping/>
-  </p:clrMapOvr>
-</p:sld>
-</file>
-
-<file path=ppt/slides/slide10.xml><?xml version="1.0" encoding="utf-8"?>
-<p:sld xmlns:a="http://schemas.openxmlformats.org/drawingml/2006/main" xmlns:p="http://schemas.openxmlformats.org/presentationml/2006/main" xmlns:r="http://schemas.openxmlformats.org/officeDocument/2006/relationships">
-  <p:cSld>
-    <p:spTree>
-      <p:nvGrpSpPr>
-        <p:cNvPr id="1" name=""/>
-        <p:cNvGrpSpPr/>
-        <p:nvPr/>
-      </p:nvGrpSpPr>
-      <p:grpSpPr/>
-      <p:sp>
-        <p:nvSpPr>
-          <p:cNvPr id="2" name="Title 1"/>
-          <p:cNvSpPr>
-            <a:spLocks noGrp="1"/>
-          </p:cNvSpPr>
-          <p:nvPr>
-            <p:ph type="title"/>
-          </p:nvPr>
-        </p:nvSpPr>
-        <p:spPr/>
-        <p:txBody>
-          <a:bodyPr/>
-          <a:lstStyle/>
-          <a:p>
-            <a:pPr>
-              <a:defRPr sz="4400">
-                <a:solidFill>
-                  <a:srgbClr val="667EEA"/>
-                </a:solidFill>
-              </a:defRPr>
-            </a:pPr>
-            <a:r>
-              <a:t>Research Trends</a:t>
-            </a:r>
-          </a:p>
-        </p:txBody>
-      </p:sp>
-      <p:sp>
-        <p:nvSpPr>
-          <p:cNvPr id="3" name="Content Placeholder 2"/>
-          <p:cNvSpPr>
-            <a:spLocks noGrp="1"/>
-          </p:cNvSpPr>
-          <p:nvPr>
-            <p:ph idx="1"/>
-          </p:nvPr>
-        </p:nvSpPr>
-        <p:spPr/>
-        <p:txBody>
-          <a:bodyPr/>
-          <a:lstStyle/>
-          <a:p/>
-        </p:txBody>
-      </p:sp>
-      <p:sp>
-        <p:nvSpPr>
-          <p:cNvPr id="4" name="TextBox 3"/>
-          <p:cNvSpPr txBox="1"/>
-          <p:nvPr/>
-        </p:nvSpPr>
-        <p:spPr>
-          <a:xfrm>
-            <a:off x="457200" y="1645920"/>
-            <a:ext cx="8229600" cy="4572000"/>
-          </a:xfrm>
-          <a:prstGeom prst="rect">
-            <a:avLst/>
-          </a:prstGeom>
-          <a:noFill/>
-        </p:spPr>
-        <p:txBody>
-          <a:bodyPr wrap="square">
-            <a:spAutoFit/>
-          </a:bodyPr>
-          <a:lstStyle/>
-          <a:p>
-            <a:pPr>
-              <a:spcBef>
-                <a:spcPts val="600"/>
-              </a:spcBef>
-              <a:defRPr sz="1800">
-                <a:solidFill>
-                  <a:srgbClr val="2D3748"/>
-                </a:solidFill>
-              </a:defRPr>
-            </a:pPr>
-            <a:r>
-              <a:t>📈 Most Active Sources:</a:t>
-            </a:r>
-          </a:p>
-          <a:p>
-            <a:pPr>
-              <a:spcBef>
-                <a:spcPts val="600"/>
-              </a:spcBef>
-              <a:defRPr sz="1800">
-                <a:solidFill>
-                  <a:srgbClr val="2D3748"/>
-                </a:solidFill>
-              </a:defRPr>
-            </a:pPr>
-            <a:r>
-              <a:t>   • arXiv: 4 papers</a:t>
-            </a:r>
-          </a:p>
-          <a:p>
-            <a:pPr>
-              <a:spcBef>
-                <a:spcPts val="600"/>
-              </a:spcBef>
-              <a:defRPr sz="1800">
-                <a:solidFill>
-                  <a:srgbClr val="2D3748"/>
-                </a:solidFill>
-              </a:defRPr>
-            </a:pPr>
-            <a:r>
-              <a:t>   • Papers with Code: 2 papers</a:t>
-            </a:r>
-          </a:p>
-          <a:p>
-            <a:pPr>
-              <a:spcBef>
-                <a:spcPts val="600"/>
-              </a:spcBef>
-              <a:defRPr sz="1800">
-                <a:solidFill>
-                  <a:srgbClr val="2D3748"/>
-                </a:solidFill>
-              </a:defRPr>
-            </a:pPr>
-          </a:p>
-          <a:p>
-            <a:pPr>
-              <a:spcBef>
-                <a:spcPts val="600"/>
-              </a:spcBef>
-              <a:defRPr sz="1800">
-                <a:solidFill>
-                  <a:srgbClr val="2D3748"/>
-                </a:solidFill>
-              </a:defRPr>
-            </a:pPr>
-            <a:r>
-              <a:t>🔮 Emerging Patterns:</a:t>
-            </a:r>
-          </a:p>
-          <a:p>
-            <a:pPr>
-              <a:spcBef>
-                <a:spcPts val="600"/>
-              </a:spcBef>
-              <a:defRPr sz="1800">
-                <a:solidFill>
-                  <a:srgbClr val="2D3748"/>
-                </a:solidFill>
-              </a:defRPr>
-            </a:pPr>
-            <a:r>
-              <a:t>   • Increasing focus on edge device optimization</a:t>
-            </a:r>
-          </a:p>
-          <a:p>
-            <a:pPr>
-              <a:spcBef>
-                <a:spcPts val="600"/>
-              </a:spcBef>
-              <a:defRPr sz="1800">
-                <a:solidFill>
-                  <a:srgbClr val="2D3748"/>
-                </a:solidFill>
-              </a:defRPr>
-            </a:pPr>
-            <a:r>
-              <a:t>   • Memory efficiency is the top priority</a:t>
-            </a:r>
-          </a:p>
-          <a:p>
-            <a:pPr>
-              <a:spcBef>
-                <a:spcPts val="600"/>
-              </a:spcBef>
-              <a:defRPr sz="1800">
-                <a:solidFill>
-                  <a:srgbClr val="2D3748"/>
-                </a:solidFill>
-              </a:defRPr>
-            </a:pPr>
-            <a:r>
-              <a:t>   • Cross-platform compatibility studies growing</a:t>
-            </a:r>
-          </a:p>
-        </p:txBody>
-      </p:sp>
-    </p:spTree>
-  </p:cSld>
-  <p:clrMapOvr>
-    <a:masterClrMapping/>
-  </p:clrMapOvr>
-</p:sld>
-</file>
-
-<file path=ppt/slides/slide11.xml><?xml version="1.0" encoding="utf-8"?>
-<p:sld xmlns:a="http://schemas.openxmlformats.org/drawingml/2006/main" xmlns:p="http://schemas.openxmlformats.org/presentationml/2006/main" xmlns:r="http://schemas.openxmlformats.org/officeDocument/2006/relationships">
-  <p:cSld>
-    <p:spTree>
-      <p:nvGrpSpPr>
-        <p:cNvPr id="1" name=""/>
-        <p:cNvGrpSpPr/>
-        <p:nvPr/>
-      </p:nvGrpSpPr>
-      <p:grpSpPr/>
-      <p:sp>
-        <p:nvSpPr>
-          <p:cNvPr id="2" name="Title 1"/>
-          <p:cNvSpPr>
-            <a:spLocks noGrp="1"/>
-          </p:cNvSpPr>
-          <p:nvPr>
-            <p:ph type="title"/>
-          </p:nvPr>
-        </p:nvSpPr>
-        <p:spPr/>
-        <p:txBody>
-          <a:bodyPr/>
-          <a:lstStyle/>
-          <a:p>
-            <a:pPr>
-              <a:defRPr sz="4400">
-                <a:solidFill>
-                  <a:srgbClr val="667EEA"/>
-                </a:solidFill>
-              </a:defRPr>
-            </a:pPr>
-            <a:r>
-              <a:t>Sources (6 total)</a:t>
-            </a:r>
-          </a:p>
-        </p:txBody>
-      </p:sp>
-      <p:sp>
-        <p:nvSpPr>
-          <p:cNvPr id="3" name="Content Placeholder 2"/>
-          <p:cNvSpPr>
-            <a:spLocks noGrp="1"/>
-          </p:cNvSpPr>
-          <p:nvPr>
-            <p:ph idx="1"/>
-          </p:nvPr>
-        </p:nvSpPr>
-        <p:spPr/>
-        <p:txBody>
-          <a:bodyPr/>
-          <a:lstStyle/>
-          <a:p/>
-        </p:txBody>
-      </p:sp>
-      <p:sp>
-        <p:nvSpPr>
-          <p:cNvPr id="4" name="TextBox 3"/>
-          <p:cNvSpPr txBox="1"/>
-          <p:nvPr/>
-        </p:nvSpPr>
-        <p:spPr>
-          <a:xfrm>
-            <a:off x="457200" y="1371600"/>
-            <a:ext cx="4114800" cy="5029200"/>
-          </a:xfrm>
-          <a:prstGeom prst="rect">
-            <a:avLst/>
-          </a:prstGeom>
-          <a:noFill/>
-        </p:spPr>
-        <p:txBody>
-          <a:bodyPr wrap="square">
-            <a:spAutoFit/>
-          </a:bodyPr>
-          <a:lstStyle/>
-          <a:p>
-            <a:pPr>
-              <a:spcBef>
-                <a:spcPts val="400"/>
-              </a:spcBef>
-              <a:defRPr sz="1100">
-                <a:solidFill>
-                  <a:srgbClr val="2D3748"/>
-                </a:solidFill>
-              </a:defRPr>
-            </a:pPr>
-            <a:r>
-              <a:t>1. INT8 Quantization: Achieving 4x Model Compres (arXiv) - 1</a:t>
-            </a:r>
-          </a:p>
-          <a:p>
-            <a:pPr>
-              <a:spcBef>
-                <a:spcPts val="400"/>
-              </a:spcBef>
-              <a:defRPr sz="1100">
-                <a:solidFill>
-                  <a:srgbClr val="2D3748"/>
-                </a:solidFill>
-              </a:defRPr>
-            </a:pPr>
-            <a:r>
-              <a:t>2. On-Device LLM Inference: Techniques and Trade (Papers with Code) - 1</a:t>
-            </a:r>
-          </a:p>
-          <a:p>
-            <a:pPr>
-              <a:spcBef>
-                <a:spcPts val="400"/>
-              </a:spcBef>
-              <a:defRPr sz="1100">
-                <a:solidFill>
-                  <a:srgbClr val="2D3748"/>
-                </a:solidFill>
-              </a:defRPr>
-            </a:pPr>
-            <a:r>
-              <a:t>3. Structured Pruning for Edge AI: A Comprehensi (arXiv) - 1</a:t>
-            </a:r>
-          </a:p>
-        </p:txBody>
-      </p:sp>
-      <p:sp>
-        <p:nvSpPr>
-          <p:cNvPr id="5" name="TextBox 4"/>
-          <p:cNvSpPr txBox="1"/>
-          <p:nvPr/>
-        </p:nvSpPr>
-        <p:spPr>
-          <a:xfrm>
-            <a:off x="4754880" y="1371600"/>
-            <a:ext cx="4114800" cy="5029200"/>
-          </a:xfrm>
-          <a:prstGeom prst="rect">
-            <a:avLst/>
-          </a:prstGeom>
-          <a:noFill/>
-        </p:spPr>
-        <p:txBody>
-          <a:bodyPr wrap="square">
-            <a:spAutoFit/>
-          </a:bodyPr>
-          <a:lstStyle/>
-          <a:p>
-            <a:pPr>
-              <a:spcBef>
-                <a:spcPts val="400"/>
-              </a:spcBef>
-              <a:defRPr sz="1100">
-                <a:solidFill>
-                  <a:srgbClr val="2D3748"/>
-                </a:solidFill>
-              </a:defRPr>
-            </a:pPr>
-            <a:r>
-              <a:t>4. Knowledge Distillation for Efficient Mobile M (Papers with Code) - 1</a:t>
-            </a:r>
-          </a:p>
-          <a:p>
-            <a:pPr>
-              <a:spcBef>
-                <a:spcPts val="400"/>
-              </a:spcBef>
-              <a:defRPr sz="1100">
-                <a:solidFill>
-                  <a:srgbClr val="2D3748"/>
-                </a:solidFill>
-              </a:defRPr>
-            </a:pPr>
-            <a:r>
-              <a:t>5. Mixed Precision Training for Efficient Infere (arXiv) - 1</a:t>
-            </a:r>
-          </a:p>
-          <a:p>
-            <a:pPr>
-              <a:spcBef>
-                <a:spcPts val="400"/>
-              </a:spcBef>
-              <a:defRPr sz="1100">
-                <a:solidFill>
-                  <a:srgbClr val="2D3748"/>
-                </a:solidFill>
-              </a:defRPr>
-            </a:pPr>
-            <a:r>
-              <a:t>6. Neural Architecture Search for Efficient Mobi (arXiv) - 1</a:t>
-            </a:r>
-          </a:p>
-        </p:txBody>
-      </p:sp>
-    </p:spTree>
-  </p:cSld>
-  <p:clrMapOvr>
-    <a:masterClrMapping/>
-  </p:clrMapOvr>
-</p:sld>
-</file>
-
-<file path=ppt/slides/slide12.xml><?xml version="1.0" encoding="utf-8"?>
-<p:sld xmlns:a="http://schemas.openxmlformats.org/drawingml/2006/main" xmlns:p="http://schemas.openxmlformats.org/presentationml/2006/main" xmlns:r="http://schemas.openxmlformats.org/officeDocument/2006/relationships">
-  <p:cSld>
-    <p:bg>
-      <p:bgPr>
-        <a:solidFill>
-          <a:srgbClr val="764BA2"/>
-        </a:solidFill>
-        <a:effectLst/>
-      </p:bgPr>
-    </p:bg>
-    <p:spTree>
-      <p:nvGrpSpPr>
-        <p:cNvPr id="1" name=""/>
-        <p:cNvGrpSpPr/>
-        <p:nvPr/>
-      </p:nvGrpSpPr>
-      <p:grpSpPr/>
-      <p:sp>
-        <p:nvSpPr>
-          <p:cNvPr id="2" name="TextBox 1"/>
-          <p:cNvSpPr txBox="1"/>
-          <p:nvPr/>
-        </p:nvSpPr>
-        <p:spPr>
-          <a:xfrm>
-            <a:off x="457200" y="1828800"/>
-            <a:ext cx="8229600" cy="1371600"/>
-          </a:xfrm>
-          <a:prstGeom prst="rect">
-            <a:avLst/>
-          </a:prstGeom>
-          <a:noFill/>
-        </p:spPr>
-        <p:txBody>
-          <a:bodyPr wrap="none">
-            <a:spAutoFit/>
-          </a:bodyPr>
-          <a:lstStyle/>
-          <a:p>
-            <a:pPr>
-              <a:defRPr sz="5400" b="1">
-                <a:solidFill>
-                  <a:srgbClr val="FFFFFF"/>
-                </a:solidFill>
-              </a:defRPr>
-            </a:pPr>
-            <a:r>
-              <a:t>Next Steps</a:t>
-            </a:r>
-          </a:p>
-        </p:txBody>
-      </p:sp>
-      <p:sp>
-        <p:nvSpPr>
-          <p:cNvPr id="3" name="TextBox 2"/>
-          <p:cNvSpPr txBox="1"/>
-          <p:nvPr/>
-        </p:nvSpPr>
-        <p:spPr>
-          <a:xfrm>
-            <a:off x="457200" y="3474720"/>
-            <a:ext cx="8229600" cy="2743200"/>
-          </a:xfrm>
-          <a:prstGeom prst="rect">
-            <a:avLst/>
-          </a:prstGeom>
-          <a:noFill/>
-        </p:spPr>
-        <p:txBody>
-          <a:bodyPr wrap="square">
-            <a:spAutoFit/>
-          </a:bodyPr>
-          <a:lstStyle/>
-          <a:p>
-            <a:pPr>
-              <a:spcBef>
-                <a:spcPts val="1000"/>
-              </a:spcBef>
-              <a:defRPr sz="2000">
-                <a:solidFill>
-                  <a:srgbClr val="FFFFFF"/>
-                </a:solidFill>
-              </a:defRPr>
-            </a:pPr>
-            <a:r>
-              <a:t>📄 Download the full PDF report</a:t>
-            </a:r>
-          </a:p>
-          <a:p>
-            <a:pPr>
-              <a:spcBef>
-                <a:spcPts val="1000"/>
-              </a:spcBef>
-              <a:defRPr sz="2000">
-                <a:solidFill>
-                  <a:srgbClr val="FFFFFF"/>
-                </a:solidFill>
-              </a:defRPr>
-            </a:pPr>
-            <a:r>
-              <a:t>🎤 Listen to the audio podcast</a:t>
-            </a:r>
-          </a:p>
-          <a:p>
-            <a:pPr>
-              <a:spcBef>
-                <a:spcPts val="1000"/>
-              </a:spcBef>
-              <a:defRPr sz="2000">
-                <a:solidFill>
-                  <a:srgbClr val="FFFFFF"/>
-                </a:solidFill>
-              </a:defRPr>
-            </a:pPr>
-            <a:r>
-              <a:t>📊 View detailed analysis dashboard</a:t>
-            </a:r>
-          </a:p>
-          <a:p>
-            <a:pPr>
-              <a:spcBef>
-                <a:spcPts val="1000"/>
-              </a:spcBef>
-              <a:defRPr sz="2000">
-                <a:solidFill>
-                  <a:srgbClr val="FFFFFF"/>
-                </a:solidFill>
-              </a:defRPr>
-            </a:pPr>
-            <a:r>
-              <a:t>🔗 Access all paper resources</a:t>
+              <a:t>3 Papers Analyzed • Hybrid RAG + Multi-Model AI</a:t>
             </a:r>
           </a:p>
         </p:txBody>
@@ -3854,7 +3305,7 @@
               </a:defRPr>
             </a:pPr>
             <a:r>
-              <a:t>📊 Total Papers: 6</a:t>
+              <a:t>📊 Total Papers: 3</a:t>
             </a:r>
           </a:p>
           <a:p>
@@ -3884,7 +3335,7 @@
               </a:defRPr>
             </a:pPr>
             <a:r>
-              <a:t>📱 Mobile Papers: 4</a:t>
+              <a:t>📱 Mobile Papers: 3</a:t>
             </a:r>
           </a:p>
           <a:p>
@@ -3899,7 +3350,7 @@
               </a:defRPr>
             </a:pPr>
             <a:r>
-              <a:t>💻 Laptop Papers: 1</a:t>
+              <a:t>💻 Laptop Papers: 0</a:t>
             </a:r>
           </a:p>
           <a:p>
@@ -4045,7 +3496,7 @@
               </a:defRPr>
             </a:pPr>
             <a:r>
-              <a:t>   • Pruning: 1 papers</a:t>
+              <a:t>   • Distillation: 1 papers</a:t>
             </a:r>
           </a:p>
           <a:p>
@@ -4060,7 +3511,7 @@
               </a:defRPr>
             </a:pPr>
             <a:r>
-              <a:t>   • Distillation: 1 papers</a:t>
+              <a:t>   • Quantization+Pruning: 1 papers</a:t>
             </a:r>
           </a:p>
           <a:p>
@@ -4178,7 +3629,7 @@
               </a:defRPr>
             </a:pPr>
             <a:r>
-              <a:t>#1: INT8 Quantization: Achieving 4x Model Compression</a:t>
+              <a:t>#1: INT8 Quantization: Achieving 4x Model Compression </a:t>
             </a:r>
           </a:p>
         </p:txBody>
@@ -4332,7 +3783,7 @@
               </a:defRPr>
             </a:pPr>
             <a:r>
-              <a:t>Implement INT8 quantization in production for 4x speedup</a:t>
+              <a:t>Implement INT8 quantization for 4x speedup on mobile</a:t>
             </a:r>
           </a:p>
         </p:txBody>
@@ -4378,7 +3829,7 @@
               </a:defRPr>
             </a:pPr>
             <a:r>
-              <a:t>#2: On-Device LLM Inference: Techniques and Trade-offs</a:t>
+              <a:t>#2: On-Device LLM Inference: KV Cache Optimization</a:t>
             </a:r>
           </a:p>
         </p:txBody>
@@ -4490,7 +3941,7 @@
               </a:defRPr>
             </a:pPr>
             <a:r>
-              <a:t>Batching and caching reduce latency</a:t>
+              <a:t>Batching and caching reduce latency by 60%</a:t>
             </a:r>
           </a:p>
           <a:p>
@@ -4578,7 +4029,7 @@
               </a:defRPr>
             </a:pPr>
             <a:r>
-              <a:t>#3: Structured Pruning for Edge AI: A Comprehensive St</a:t>
+              <a:t>#3: Knowledge Distillation for Mobile Models: 6x Compr</a:t>
             </a:r>
           </a:p>
         </p:txBody>
@@ -4633,7 +4084,7 @@
               </a:defRPr>
             </a:pPr>
             <a:r>
-              <a:t>Score: 0.92/100 | Platform: Edge | Model: CNN</a:t>
+              <a:t>Score: 0.89/100 | Platform: Mobile | Model: BERT</a:t>
             </a:r>
           </a:p>
           <a:p>
@@ -4648,7 +4099,7 @@
               </a:defRPr>
             </a:pPr>
             <a:r>
-              <a:t>DRAM Impact: Medium</a:t>
+              <a:t>DRAM Impact: Low</a:t>
             </a:r>
           </a:p>
           <a:p>
@@ -4690,7 +4141,7 @@
               </a:defRPr>
             </a:pPr>
             <a:r>
-              <a:t>Achieve 50% sparsity with structured pruning</a:t>
+              <a:t>Student models 6x smaller than teacher with 95% accuracy retention</a:t>
             </a:r>
           </a:p>
           <a:p>
@@ -4732,7 +4183,7 @@
               </a:defRPr>
             </a:pPr>
             <a:r>
-              <a:t>Use fine-grained structured pruning for mobile</a:t>
+              <a:t>Deploy knowledge distillation pipelines in production</a:t>
             </a:r>
           </a:p>
         </p:txBody>
@@ -4771,14 +4222,14 @@
           <a:lstStyle/>
           <a:p>
             <a:pPr>
-              <a:defRPr sz="3200">
+              <a:defRPr sz="4400">
                 <a:solidFill>
                   <a:srgbClr val="667EEA"/>
                 </a:solidFill>
               </a:defRPr>
             </a:pPr>
             <a:r>
-              <a:t>#4: Knowledge Distillation for Efficient Mobile Models</a:t>
+              <a:t>Research Trends</a:t>
             </a:r>
           </a:p>
         </p:txBody>
@@ -4808,8 +4259,8 @@
         </p:nvSpPr>
         <p:spPr>
           <a:xfrm>
-            <a:off x="457200" y="1371600"/>
-            <a:ext cx="8229600" cy="5029200"/>
+            <a:off x="457200" y="1645920"/>
+            <a:ext cx="8229600" cy="4572000"/>
           </a:xfrm>
           <a:prstGeom prst="rect">
             <a:avLst/>
@@ -4824,115 +4275,118 @@
           <a:p>
             <a:pPr>
               <a:spcBef>
-                <a:spcPts val="400"/>
-              </a:spcBef>
-              <a:defRPr sz="1600" b="1">
+                <a:spcPts val="600"/>
+              </a:spcBef>
+              <a:defRPr sz="1800">
                 <a:solidFill>
                   <a:srgbClr val="2D3748"/>
                 </a:solidFill>
               </a:defRPr>
             </a:pPr>
             <a:r>
-              <a:t>Score: 0.89/100 | Platform: Mobile | Model: BERT</a:t>
-            </a:r>
-          </a:p>
-          <a:p>
-            <a:pPr>
-              <a:spcBef>
-                <a:spcPts val="400"/>
-              </a:spcBef>
-              <a:defRPr sz="1600">
+              <a:t>📈 Most Active Sources:</a:t>
+            </a:r>
+          </a:p>
+          <a:p>
+            <a:pPr>
+              <a:spcBef>
+                <a:spcPts val="600"/>
+              </a:spcBef>
+              <a:defRPr sz="1800">
                 <a:solidFill>
                   <a:srgbClr val="2D3748"/>
                 </a:solidFill>
               </a:defRPr>
             </a:pPr>
             <a:r>
-              <a:t>DRAM Impact: Low</a:t>
-            </a:r>
-          </a:p>
-          <a:p>
-            <a:pPr>
-              <a:spcBef>
-                <a:spcPts val="400"/>
-              </a:spcBef>
-              <a:defRPr sz="1600" b="1">
+              <a:t>   • Papers with Code: 2 papers</a:t>
+            </a:r>
+          </a:p>
+          <a:p>
+            <a:pPr>
+              <a:spcBef>
+                <a:spcPts val="600"/>
+              </a:spcBef>
+              <a:defRPr sz="1800">
                 <a:solidFill>
                   <a:srgbClr val="2D3748"/>
                 </a:solidFill>
               </a:defRPr>
             </a:pPr>
-          </a:p>
-          <a:p>
-            <a:pPr>
-              <a:spcBef>
-                <a:spcPts val="400"/>
-              </a:spcBef>
-              <a:defRPr sz="1600">
+            <a:r>
+              <a:t>   • arXiv: 1 papers</a:t>
+            </a:r>
+          </a:p>
+          <a:p>
+            <a:pPr>
+              <a:spcBef>
+                <a:spcPts val="600"/>
+              </a:spcBef>
+              <a:defRPr sz="1800">
                 <a:solidFill>
                   <a:srgbClr val="2D3748"/>
                 </a:solidFill>
               </a:defRPr>
             </a:pPr>
-            <a:r>
-              <a:t>💾 Memory Insight:</a:t>
-            </a:r>
-          </a:p>
-          <a:p>
-            <a:pPr>
-              <a:spcBef>
-                <a:spcPts val="400"/>
-              </a:spcBef>
-              <a:defRPr sz="1600" b="1">
+          </a:p>
+          <a:p>
+            <a:pPr>
+              <a:spcBef>
+                <a:spcPts val="600"/>
+              </a:spcBef>
+              <a:defRPr sz="1800">
                 <a:solidFill>
                   <a:srgbClr val="2D3748"/>
                 </a:solidFill>
               </a:defRPr>
             </a:pPr>
             <a:r>
-              <a:t>Student models 6x smaller than teacher</a:t>
-            </a:r>
-          </a:p>
-          <a:p>
-            <a:pPr>
-              <a:spcBef>
-                <a:spcPts val="400"/>
-              </a:spcBef>
-              <a:defRPr sz="1600">
+              <a:t>🔮 Emerging Patterns:</a:t>
+            </a:r>
+          </a:p>
+          <a:p>
+            <a:pPr>
+              <a:spcBef>
+                <a:spcPts val="600"/>
+              </a:spcBef>
+              <a:defRPr sz="1800">
                 <a:solidFill>
                   <a:srgbClr val="2D3748"/>
                 </a:solidFill>
               </a:defRPr>
             </a:pPr>
-          </a:p>
-          <a:p>
-            <a:pPr>
-              <a:spcBef>
-                <a:spcPts val="400"/>
-              </a:spcBef>
-              <a:defRPr sz="1600" b="1">
+            <a:r>
+              <a:t>   • Increasing focus on edge device optimization</a:t>
+            </a:r>
+          </a:p>
+          <a:p>
+            <a:pPr>
+              <a:spcBef>
+                <a:spcPts val="600"/>
+              </a:spcBef>
+              <a:defRPr sz="1800">
                 <a:solidFill>
                   <a:srgbClr val="2D3748"/>
                 </a:solidFill>
               </a:defRPr>
             </a:pPr>
             <a:r>
-              <a:t>⚙️ Engineering Takeaway:</a:t>
-            </a:r>
-          </a:p>
-          <a:p>
-            <a:pPr>
-              <a:spcBef>
-                <a:spcPts val="400"/>
-              </a:spcBef>
-              <a:defRPr sz="1600">
+              <a:t>   • Memory efficiency is the top priority</a:t>
+            </a:r>
+          </a:p>
+          <a:p>
+            <a:pPr>
+              <a:spcBef>
+                <a:spcPts val="600"/>
+              </a:spcBef>
+              <a:defRPr sz="1800">
                 <a:solidFill>
                   <a:srgbClr val="2D3748"/>
                 </a:solidFill>
               </a:defRPr>
             </a:pPr>
             <a:r>
-              <a:t>Implement knowledge distillation pipeline</a:t>
+              <a:t>   • Cross-platform compatibility studies growing</a:t>
             </a:r>
           </a:p>
         </p:txBody>
@@ -4971,14 +4425,14 @@
           <a:lstStyle/>
           <a:p>
             <a:pPr>
-              <a:defRPr sz="3200">
+              <a:defRPr sz="4400">
                 <a:solidFill>
                   <a:srgbClr val="667EEA"/>
                 </a:solidFill>
               </a:defRPr>
             </a:pPr>
             <a:r>
-              <a:t>#5: Mixed Precision Training for Efficient Inference</a:t>
+              <a:t>Sources (3 total)</a:t>
             </a:r>
           </a:p>
         </p:txBody>
@@ -5009,7 +4463,7 @@
         <p:spPr>
           <a:xfrm>
             <a:off x="457200" y="1371600"/>
-            <a:ext cx="8229600" cy="5029200"/>
+            <a:ext cx="4114800" cy="5029200"/>
           </a:xfrm>
           <a:prstGeom prst="rect">
             <a:avLst/>
@@ -5026,14 +4480,14 @@
               <a:spcBef>
                 <a:spcPts val="400"/>
               </a:spcBef>
-              <a:defRPr sz="1600" b="1">
+              <a:defRPr sz="1100">
                 <a:solidFill>
                   <a:srgbClr val="2D3748"/>
                 </a:solidFill>
               </a:defRPr>
             </a:pPr>
             <a:r>
-              <a:t>Score: 0.88/100 | Platform: Laptop | Model: ResNet</a:t>
+              <a:t>1. INT8 Quantization: Achieving 4x Model Compres (arXiv) - 1</a:t>
             </a:r>
           </a:p>
           <a:p>
@@ -5041,98 +4495,52 @@
               <a:spcBef>
                 <a:spcPts val="400"/>
               </a:spcBef>
-              <a:defRPr sz="1600">
+              <a:defRPr sz="1100">
                 <a:solidFill>
                   <a:srgbClr val="2D3748"/>
                 </a:solidFill>
               </a:defRPr>
             </a:pPr>
             <a:r>
-              <a:t>DRAM Impact: Medium</a:t>
-            </a:r>
-          </a:p>
+              <a:t>2. On-Device LLM Inference: KV Cache Optimizatio (Papers with Code) - 1</a:t>
+            </a:r>
+          </a:p>
+        </p:txBody>
+      </p:sp>
+      <p:sp>
+        <p:nvSpPr>
+          <p:cNvPr id="5" name="TextBox 4"/>
+          <p:cNvSpPr txBox="1"/>
+          <p:nvPr/>
+        </p:nvSpPr>
+        <p:spPr>
+          <a:xfrm>
+            <a:off x="4754880" y="1371600"/>
+            <a:ext cx="4114800" cy="5029200"/>
+          </a:xfrm>
+          <a:prstGeom prst="rect">
+            <a:avLst/>
+          </a:prstGeom>
+          <a:noFill/>
+        </p:spPr>
+        <p:txBody>
+          <a:bodyPr wrap="square">
+            <a:spAutoFit/>
+          </a:bodyPr>
+          <a:lstStyle/>
           <a:p>
             <a:pPr>
               <a:spcBef>
                 <a:spcPts val="400"/>
               </a:spcBef>
-              <a:defRPr sz="1600" b="1">
+              <a:defRPr sz="1100">
                 <a:solidFill>
                   <a:srgbClr val="2D3748"/>
                 </a:solidFill>
               </a:defRPr>
             </a:pPr>
-          </a:p>
-          <a:p>
-            <a:pPr>
-              <a:spcBef>
-                <a:spcPts val="400"/>
-              </a:spcBef>
-              <a:defRPr sz="1600">
-                <a:solidFill>
-                  <a:srgbClr val="2D3748"/>
-                </a:solidFill>
-              </a:defRPr>
-            </a:pPr>
-            <a:r>
-              <a:t>💾 Memory Insight:</a:t>
-            </a:r>
-          </a:p>
-          <a:p>
-            <a:pPr>
-              <a:spcBef>
-                <a:spcPts val="400"/>
-              </a:spcBef>
-              <a:defRPr sz="1600" b="1">
-                <a:solidFill>
-                  <a:srgbClr val="2D3748"/>
-                </a:solidFill>
-              </a:defRPr>
-            </a:pPr>
-            <a:r>
-              <a:t>Mixed precision reduces memory by 40%</a:t>
-            </a:r>
-          </a:p>
-          <a:p>
-            <a:pPr>
-              <a:spcBef>
-                <a:spcPts val="400"/>
-              </a:spcBef>
-              <a:defRPr sz="1600">
-                <a:solidFill>
-                  <a:srgbClr val="2D3748"/>
-                </a:solidFill>
-              </a:defRPr>
-            </a:pPr>
-          </a:p>
-          <a:p>
-            <a:pPr>
-              <a:spcBef>
-                <a:spcPts val="400"/>
-              </a:spcBef>
-              <a:defRPr sz="1600" b="1">
-                <a:solidFill>
-                  <a:srgbClr val="2D3748"/>
-                </a:solidFill>
-              </a:defRPr>
-            </a:pPr>
-            <a:r>
-              <a:t>⚙️ Engineering Takeaway:</a:t>
-            </a:r>
-          </a:p>
-          <a:p>
-            <a:pPr>
-              <a:spcBef>
-                <a:spcPts val="400"/>
-              </a:spcBef>
-              <a:defRPr sz="1600">
-                <a:solidFill>
-                  <a:srgbClr val="2D3748"/>
-                </a:solidFill>
-              </a:defRPr>
-            </a:pPr>
-            <a:r>
-              <a:t>Use mixed precision for training and inference</a:t>
+            <a:r>
+              <a:t>3. Knowledge Distillation for Mobile Models: 6x  (Papers with Code) - 1</a:t>
             </a:r>
           </a:p>
         </p:txBody>
@@ -5148,6 +4556,14 @@
 <file path=ppt/slides/slide9.xml><?xml version="1.0" encoding="utf-8"?>
 <p:sld xmlns:a="http://schemas.openxmlformats.org/drawingml/2006/main" xmlns:p="http://schemas.openxmlformats.org/presentationml/2006/main" xmlns:r="http://schemas.openxmlformats.org/officeDocument/2006/relationships">
   <p:cSld>
+    <p:bg>
+      <p:bgPr>
+        <a:solidFill>
+          <a:srgbClr val="764BA2"/>
+        </a:solidFill>
+        <a:effectLst/>
+      </p:bgPr>
+    </p:bg>
     <p:spTree>
       <p:nvGrpSpPr>
         <p:cNvPr id="1" name=""/>
@@ -5157,59 +4573,14 @@
       <p:grpSpPr/>
       <p:sp>
         <p:nvSpPr>
-          <p:cNvPr id="2" name="Title 1"/>
-          <p:cNvSpPr>
-            <a:spLocks noGrp="1"/>
-          </p:cNvSpPr>
-          <p:nvPr>
-            <p:ph type="title"/>
-          </p:nvPr>
-        </p:nvSpPr>
-        <p:spPr/>
-        <p:txBody>
-          <a:bodyPr/>
-          <a:lstStyle/>
-          <a:p>
-            <a:pPr>
-              <a:defRPr sz="3200">
-                <a:solidFill>
-                  <a:srgbClr val="667EEA"/>
-                </a:solidFill>
-              </a:defRPr>
-            </a:pPr>
-            <a:r>
-              <a:t>#6: Neural Architecture Search for Efficient Mobile Mo</a:t>
-            </a:r>
-          </a:p>
-        </p:txBody>
-      </p:sp>
-      <p:sp>
-        <p:nvSpPr>
-          <p:cNvPr id="3" name="Content Placeholder 2"/>
-          <p:cNvSpPr>
-            <a:spLocks noGrp="1"/>
-          </p:cNvSpPr>
-          <p:nvPr>
-            <p:ph idx="1"/>
-          </p:nvPr>
-        </p:nvSpPr>
-        <p:spPr/>
-        <p:txBody>
-          <a:bodyPr/>
-          <a:lstStyle/>
-          <a:p/>
-        </p:txBody>
-      </p:sp>
-      <p:sp>
-        <p:nvSpPr>
-          <p:cNvPr id="4" name="TextBox 3"/>
+          <p:cNvPr id="2" name="TextBox 1"/>
           <p:cNvSpPr txBox="1"/>
           <p:nvPr/>
         </p:nvSpPr>
         <p:spPr>
           <a:xfrm>
-            <a:off x="457200" y="1371600"/>
-            <a:ext cx="8229600" cy="5029200"/>
+            <a:off x="457200" y="1828800"/>
+            <a:ext cx="8229600" cy="1371600"/>
           </a:xfrm>
           <a:prstGeom prst="rect">
             <a:avLst/>
@@ -5217,6 +4588,41 @@
           <a:noFill/>
         </p:spPr>
         <p:txBody>
+          <a:bodyPr wrap="none">
+            <a:spAutoFit/>
+          </a:bodyPr>
+          <a:lstStyle/>
+          <a:p>
+            <a:pPr>
+              <a:defRPr sz="5400" b="1">
+                <a:solidFill>
+                  <a:srgbClr val="FFFFFF"/>
+                </a:solidFill>
+              </a:defRPr>
+            </a:pPr>
+            <a:r>
+              <a:t>Next Steps</a:t>
+            </a:r>
+          </a:p>
+        </p:txBody>
+      </p:sp>
+      <p:sp>
+        <p:nvSpPr>
+          <p:cNvPr id="3" name="TextBox 2"/>
+          <p:cNvSpPr txBox="1"/>
+          <p:nvPr/>
+        </p:nvSpPr>
+        <p:spPr>
+          <a:xfrm>
+            <a:off x="457200" y="3474720"/>
+            <a:ext cx="8229600" cy="2743200"/>
+          </a:xfrm>
+          <a:prstGeom prst="rect">
+            <a:avLst/>
+          </a:prstGeom>
+          <a:noFill/>
+        </p:spPr>
+        <p:txBody>
           <a:bodyPr wrap="square">
             <a:spAutoFit/>
           </a:bodyPr>
@@ -5224,115 +4630,61 @@
           <a:p>
             <a:pPr>
               <a:spcBef>
-                <a:spcPts val="400"/>
-              </a:spcBef>
-              <a:defRPr sz="1600" b="1">
-                <a:solidFill>
-                  <a:srgbClr val="2D3748"/>
-                </a:solidFill>
-              </a:defRPr>
-            </a:pPr>
-            <a:r>
-              <a:t>Score: 0.86/100 | Platform: Mobile | Model: MobileNet</a:t>
-            </a:r>
-          </a:p>
-          <a:p>
-            <a:pPr>
-              <a:spcBef>
-                <a:spcPts val="400"/>
-              </a:spcBef>
-              <a:defRPr sz="1600">
-                <a:solidFill>
-                  <a:srgbClr val="2D3748"/>
-                </a:solidFill>
-              </a:defRPr>
-            </a:pPr>
-            <a:r>
-              <a:t>DRAM Impact: Medium</a:t>
-            </a:r>
-          </a:p>
-          <a:p>
-            <a:pPr>
-              <a:spcBef>
-                <a:spcPts val="400"/>
-              </a:spcBef>
-              <a:defRPr sz="1600" b="1">
-                <a:solidFill>
-                  <a:srgbClr val="2D3748"/>
-                </a:solidFill>
-              </a:defRPr>
-            </a:pPr>
-          </a:p>
-          <a:p>
-            <a:pPr>
-              <a:spcBef>
-                <a:spcPts val="400"/>
-              </a:spcBef>
-              <a:defRPr sz="1600">
-                <a:solidFill>
-                  <a:srgbClr val="2D3748"/>
-                </a:solidFill>
-              </a:defRPr>
-            </a:pPr>
-            <a:r>
-              <a:t>💾 Memory Insight:</a:t>
-            </a:r>
-          </a:p>
-          <a:p>
-            <a:pPr>
-              <a:spcBef>
-                <a:spcPts val="400"/>
-              </a:spcBef>
-              <a:defRPr sz="1600" b="1">
-                <a:solidFill>
-                  <a:srgbClr val="2D3748"/>
-                </a:solidFill>
-              </a:defRPr>
-            </a:pPr>
-            <a:r>
-              <a:t>NAS finds models 40% smaller automatically</a:t>
-            </a:r>
-          </a:p>
-          <a:p>
-            <a:pPr>
-              <a:spcBef>
-                <a:spcPts val="400"/>
-              </a:spcBef>
-              <a:defRPr sz="1600">
-                <a:solidFill>
-                  <a:srgbClr val="2D3748"/>
-                </a:solidFill>
-              </a:defRPr>
-            </a:pPr>
-          </a:p>
-          <a:p>
-            <a:pPr>
-              <a:spcBef>
-                <a:spcPts val="400"/>
-              </a:spcBef>
-              <a:defRPr sz="1600" b="1">
-                <a:solidFill>
-                  <a:srgbClr val="2D3748"/>
-                </a:solidFill>
-              </a:defRPr>
-            </a:pPr>
-            <a:r>
-              <a:t>⚙️ Engineering Takeaway:</a:t>
-            </a:r>
-          </a:p>
-          <a:p>
-            <a:pPr>
-              <a:spcBef>
-                <a:spcPts val="400"/>
-              </a:spcBef>
-              <a:defRPr sz="1600">
-                <a:solidFill>
-                  <a:srgbClr val="2D3748"/>
-                </a:solidFill>
-              </a:defRPr>
-            </a:pPr>
-            <a:r>
-              <a:t>Deploy NAS-discovered architectures</a:t>
+                <a:spcPts val="1000"/>
+              </a:spcBef>
+              <a:defRPr sz="2000">
+                <a:solidFill>
+                  <a:srgbClr val="FFFFFF"/>
+                </a:solidFill>
+              </a:defRPr>
+            </a:pPr>
+            <a:r>
+              <a:t>📄 Download the full PDF report</a:t>
+            </a:r>
+          </a:p>
+          <a:p>
+            <a:pPr>
+              <a:spcBef>
+                <a:spcPts val="1000"/>
+              </a:spcBef>
+              <a:defRPr sz="2000">
+                <a:solidFill>
+                  <a:srgbClr val="FFFFFF"/>
+                </a:solidFill>
+              </a:defRPr>
+            </a:pPr>
+            <a:r>
+              <a:t>🎤 Listen to the audio podcast</a:t>
+            </a:r>
+          </a:p>
+          <a:p>
+            <a:pPr>
+              <a:spcBef>
+                <a:spcPts val="1000"/>
+              </a:spcBef>
+              <a:defRPr sz="2000">
+                <a:solidFill>
+                  <a:srgbClr val="FFFFFF"/>
+                </a:solidFill>
+              </a:defRPr>
+            </a:pPr>
+            <a:r>
+              <a:t>📊 View detailed analysis dashboard</a:t>
+            </a:r>
+          </a:p>
+          <a:p>
+            <a:pPr>
+              <a:spcBef>
+                <a:spcPts val="1000"/>
+              </a:spcBef>
+              <a:defRPr sz="2000">
+                <a:solidFill>
+                  <a:srgbClr val="FFFFFF"/>
+                </a:solidFill>
+              </a:defRPr>
+            </a:pPr>
+            <a:r>
+              <a:t>🔗 Access all paper resources</a:t>
             </a:r>
           </a:p>
         </p:txBody>

--- a/results/reports/report.pptx
+++ b/results/reports/report.pptx
@@ -14,6 +14,9 @@
     <p:sldId id="262" r:id="rId13"/>
     <p:sldId id="263" r:id="rId14"/>
     <p:sldId id="264" r:id="rId15"/>
+    <p:sldId id="265" r:id="rId16"/>
+    <p:sldId id="266" r:id="rId17"/>
+    <p:sldId id="267" r:id="rId18"/>
   </p:sldIdLst>
   <p:sldSz cx="9144000" cy="6858000" type="screen4x3"/>
   <p:notesSz cx="6858000" cy="9144000"/>
@@ -3204,7 +3207,553 @@
               </a:defRPr>
             </a:pPr>
             <a:r>
-              <a:t>3 Papers Analyzed • Hybrid RAG + Multi-Model AI</a:t>
+              <a:t>6 Papers Analyzed • Hybrid RAG + Multi-Model AI</a:t>
+            </a:r>
+          </a:p>
+        </p:txBody>
+      </p:sp>
+    </p:spTree>
+  </p:cSld>
+  <p:clrMapOvr>
+    <a:masterClrMapping/>
+  </p:clrMapOvr>
+</p:sld>
+</file>
+
+<file path=ppt/slides/slide10.xml><?xml version="1.0" encoding="utf-8"?>
+<p:sld xmlns:a="http://schemas.openxmlformats.org/drawingml/2006/main" xmlns:p="http://schemas.openxmlformats.org/presentationml/2006/main" xmlns:r="http://schemas.openxmlformats.org/officeDocument/2006/relationships">
+  <p:cSld>
+    <p:spTree>
+      <p:nvGrpSpPr>
+        <p:cNvPr id="1" name=""/>
+        <p:cNvGrpSpPr/>
+        <p:nvPr/>
+      </p:nvGrpSpPr>
+      <p:grpSpPr/>
+      <p:sp>
+        <p:nvSpPr>
+          <p:cNvPr id="2" name="Title 1"/>
+          <p:cNvSpPr>
+            <a:spLocks noGrp="1"/>
+          </p:cNvSpPr>
+          <p:nvPr>
+            <p:ph type="title"/>
+          </p:nvPr>
+        </p:nvSpPr>
+        <p:spPr/>
+        <p:txBody>
+          <a:bodyPr/>
+          <a:lstStyle/>
+          <a:p>
+            <a:pPr>
+              <a:defRPr sz="4400">
+                <a:solidFill>
+                  <a:srgbClr val="667EEA"/>
+                </a:solidFill>
+              </a:defRPr>
+            </a:pPr>
+            <a:r>
+              <a:t>Research Trends</a:t>
+            </a:r>
+          </a:p>
+        </p:txBody>
+      </p:sp>
+      <p:sp>
+        <p:nvSpPr>
+          <p:cNvPr id="3" name="Content Placeholder 2"/>
+          <p:cNvSpPr>
+            <a:spLocks noGrp="1"/>
+          </p:cNvSpPr>
+          <p:nvPr>
+            <p:ph idx="1"/>
+          </p:nvPr>
+        </p:nvSpPr>
+        <p:spPr/>
+        <p:txBody>
+          <a:bodyPr/>
+          <a:lstStyle/>
+          <a:p/>
+        </p:txBody>
+      </p:sp>
+      <p:sp>
+        <p:nvSpPr>
+          <p:cNvPr id="4" name="TextBox 3"/>
+          <p:cNvSpPr txBox="1"/>
+          <p:nvPr/>
+        </p:nvSpPr>
+        <p:spPr>
+          <a:xfrm>
+            <a:off x="457200" y="1645920"/>
+            <a:ext cx="8229600" cy="4572000"/>
+          </a:xfrm>
+          <a:prstGeom prst="rect">
+            <a:avLst/>
+          </a:prstGeom>
+          <a:noFill/>
+        </p:spPr>
+        <p:txBody>
+          <a:bodyPr wrap="square">
+            <a:spAutoFit/>
+          </a:bodyPr>
+          <a:lstStyle/>
+          <a:p>
+            <a:pPr>
+              <a:spcBef>
+                <a:spcPts val="600"/>
+              </a:spcBef>
+              <a:defRPr sz="1800">
+                <a:solidFill>
+                  <a:srgbClr val="2D3748"/>
+                </a:solidFill>
+              </a:defRPr>
+            </a:pPr>
+            <a:r>
+              <a:t>📈 Most Active Sources:</a:t>
+            </a:r>
+          </a:p>
+          <a:p>
+            <a:pPr>
+              <a:spcBef>
+                <a:spcPts val="600"/>
+              </a:spcBef>
+              <a:defRPr sz="1800">
+                <a:solidFill>
+                  <a:srgbClr val="2D3748"/>
+                </a:solidFill>
+              </a:defRPr>
+            </a:pPr>
+            <a:r>
+              <a:t>   • arXiv: 4 papers</a:t>
+            </a:r>
+          </a:p>
+          <a:p>
+            <a:pPr>
+              <a:spcBef>
+                <a:spcPts val="600"/>
+              </a:spcBef>
+              <a:defRPr sz="1800">
+                <a:solidFill>
+                  <a:srgbClr val="2D3748"/>
+                </a:solidFill>
+              </a:defRPr>
+            </a:pPr>
+            <a:r>
+              <a:t>   • Papers with Code: 2 papers</a:t>
+            </a:r>
+          </a:p>
+          <a:p>
+            <a:pPr>
+              <a:spcBef>
+                <a:spcPts val="600"/>
+              </a:spcBef>
+              <a:defRPr sz="1800">
+                <a:solidFill>
+                  <a:srgbClr val="2D3748"/>
+                </a:solidFill>
+              </a:defRPr>
+            </a:pPr>
+          </a:p>
+          <a:p>
+            <a:pPr>
+              <a:spcBef>
+                <a:spcPts val="600"/>
+              </a:spcBef>
+              <a:defRPr sz="1800">
+                <a:solidFill>
+                  <a:srgbClr val="2D3748"/>
+                </a:solidFill>
+              </a:defRPr>
+            </a:pPr>
+            <a:r>
+              <a:t>🔮 Emerging Patterns:</a:t>
+            </a:r>
+          </a:p>
+          <a:p>
+            <a:pPr>
+              <a:spcBef>
+                <a:spcPts val="600"/>
+              </a:spcBef>
+              <a:defRPr sz="1800">
+                <a:solidFill>
+                  <a:srgbClr val="2D3748"/>
+                </a:solidFill>
+              </a:defRPr>
+            </a:pPr>
+            <a:r>
+              <a:t>   • Increasing focus on edge device optimization</a:t>
+            </a:r>
+          </a:p>
+          <a:p>
+            <a:pPr>
+              <a:spcBef>
+                <a:spcPts val="600"/>
+              </a:spcBef>
+              <a:defRPr sz="1800">
+                <a:solidFill>
+                  <a:srgbClr val="2D3748"/>
+                </a:solidFill>
+              </a:defRPr>
+            </a:pPr>
+            <a:r>
+              <a:t>   • Memory efficiency is the top priority</a:t>
+            </a:r>
+          </a:p>
+          <a:p>
+            <a:pPr>
+              <a:spcBef>
+                <a:spcPts val="600"/>
+              </a:spcBef>
+              <a:defRPr sz="1800">
+                <a:solidFill>
+                  <a:srgbClr val="2D3748"/>
+                </a:solidFill>
+              </a:defRPr>
+            </a:pPr>
+            <a:r>
+              <a:t>   • Cross-platform compatibility studies growing</a:t>
+            </a:r>
+          </a:p>
+        </p:txBody>
+      </p:sp>
+    </p:spTree>
+  </p:cSld>
+  <p:clrMapOvr>
+    <a:masterClrMapping/>
+  </p:clrMapOvr>
+</p:sld>
+</file>
+
+<file path=ppt/slides/slide11.xml><?xml version="1.0" encoding="utf-8"?>
+<p:sld xmlns:a="http://schemas.openxmlformats.org/drawingml/2006/main" xmlns:p="http://schemas.openxmlformats.org/presentationml/2006/main" xmlns:r="http://schemas.openxmlformats.org/officeDocument/2006/relationships">
+  <p:cSld>
+    <p:spTree>
+      <p:nvGrpSpPr>
+        <p:cNvPr id="1" name=""/>
+        <p:cNvGrpSpPr/>
+        <p:nvPr/>
+      </p:nvGrpSpPr>
+      <p:grpSpPr/>
+      <p:sp>
+        <p:nvSpPr>
+          <p:cNvPr id="2" name="Title 1"/>
+          <p:cNvSpPr>
+            <a:spLocks noGrp="1"/>
+          </p:cNvSpPr>
+          <p:nvPr>
+            <p:ph type="title"/>
+          </p:nvPr>
+        </p:nvSpPr>
+        <p:spPr/>
+        <p:txBody>
+          <a:bodyPr/>
+          <a:lstStyle/>
+          <a:p>
+            <a:pPr>
+              <a:defRPr sz="4400">
+                <a:solidFill>
+                  <a:srgbClr val="667EEA"/>
+                </a:solidFill>
+              </a:defRPr>
+            </a:pPr>
+            <a:r>
+              <a:t>Sources (6 total)</a:t>
+            </a:r>
+          </a:p>
+        </p:txBody>
+      </p:sp>
+      <p:sp>
+        <p:nvSpPr>
+          <p:cNvPr id="3" name="Content Placeholder 2"/>
+          <p:cNvSpPr>
+            <a:spLocks noGrp="1"/>
+          </p:cNvSpPr>
+          <p:nvPr>
+            <p:ph idx="1"/>
+          </p:nvPr>
+        </p:nvSpPr>
+        <p:spPr/>
+        <p:txBody>
+          <a:bodyPr/>
+          <a:lstStyle/>
+          <a:p/>
+        </p:txBody>
+      </p:sp>
+      <p:sp>
+        <p:nvSpPr>
+          <p:cNvPr id="4" name="TextBox 3"/>
+          <p:cNvSpPr txBox="1"/>
+          <p:nvPr/>
+        </p:nvSpPr>
+        <p:spPr>
+          <a:xfrm>
+            <a:off x="457200" y="1371600"/>
+            <a:ext cx="4114800" cy="5029200"/>
+          </a:xfrm>
+          <a:prstGeom prst="rect">
+            <a:avLst/>
+          </a:prstGeom>
+          <a:noFill/>
+        </p:spPr>
+        <p:txBody>
+          <a:bodyPr wrap="square">
+            <a:spAutoFit/>
+          </a:bodyPr>
+          <a:lstStyle/>
+          <a:p>
+            <a:pPr>
+              <a:spcBef>
+                <a:spcPts val="400"/>
+              </a:spcBef>
+              <a:defRPr sz="1100">
+                <a:solidFill>
+                  <a:srgbClr val="2D3748"/>
+                </a:solidFill>
+              </a:defRPr>
+            </a:pPr>
+            <a:r>
+              <a:t>1. INT8 Quantization: Achieving 4x Model Compres (arXiv) - 1</a:t>
+            </a:r>
+          </a:p>
+          <a:p>
+            <a:pPr>
+              <a:spcBef>
+                <a:spcPts val="400"/>
+              </a:spcBef>
+              <a:defRPr sz="1100">
+                <a:solidFill>
+                  <a:srgbClr val="2D3748"/>
+                </a:solidFill>
+              </a:defRPr>
+            </a:pPr>
+            <a:r>
+              <a:t>2. On-Device LLM Inference: Techniques and Trade (Papers with Code) - 1</a:t>
+            </a:r>
+          </a:p>
+          <a:p>
+            <a:pPr>
+              <a:spcBef>
+                <a:spcPts val="400"/>
+              </a:spcBef>
+              <a:defRPr sz="1100">
+                <a:solidFill>
+                  <a:srgbClr val="2D3748"/>
+                </a:solidFill>
+              </a:defRPr>
+            </a:pPr>
+            <a:r>
+              <a:t>3. Structured Pruning for Edge AI: A Comprehensi (arXiv) - 1</a:t>
+            </a:r>
+          </a:p>
+        </p:txBody>
+      </p:sp>
+      <p:sp>
+        <p:nvSpPr>
+          <p:cNvPr id="5" name="TextBox 4"/>
+          <p:cNvSpPr txBox="1"/>
+          <p:nvPr/>
+        </p:nvSpPr>
+        <p:spPr>
+          <a:xfrm>
+            <a:off x="4754880" y="1371600"/>
+            <a:ext cx="4114800" cy="5029200"/>
+          </a:xfrm>
+          <a:prstGeom prst="rect">
+            <a:avLst/>
+          </a:prstGeom>
+          <a:noFill/>
+        </p:spPr>
+        <p:txBody>
+          <a:bodyPr wrap="square">
+            <a:spAutoFit/>
+          </a:bodyPr>
+          <a:lstStyle/>
+          <a:p>
+            <a:pPr>
+              <a:spcBef>
+                <a:spcPts val="400"/>
+              </a:spcBef>
+              <a:defRPr sz="1100">
+                <a:solidFill>
+                  <a:srgbClr val="2D3748"/>
+                </a:solidFill>
+              </a:defRPr>
+            </a:pPr>
+            <a:r>
+              <a:t>4. Knowledge Distillation for Efficient Mobile M (Papers with Code) - 1</a:t>
+            </a:r>
+          </a:p>
+          <a:p>
+            <a:pPr>
+              <a:spcBef>
+                <a:spcPts val="400"/>
+              </a:spcBef>
+              <a:defRPr sz="1100">
+                <a:solidFill>
+                  <a:srgbClr val="2D3748"/>
+                </a:solidFill>
+              </a:defRPr>
+            </a:pPr>
+            <a:r>
+              <a:t>5. Mixed Precision Training for Efficient Infere (arXiv) - 1</a:t>
+            </a:r>
+          </a:p>
+          <a:p>
+            <a:pPr>
+              <a:spcBef>
+                <a:spcPts val="400"/>
+              </a:spcBef>
+              <a:defRPr sz="1100">
+                <a:solidFill>
+                  <a:srgbClr val="2D3748"/>
+                </a:solidFill>
+              </a:defRPr>
+            </a:pPr>
+            <a:r>
+              <a:t>6. Neural Architecture Search for Efficient Mobi (arXiv) - 1</a:t>
+            </a:r>
+          </a:p>
+        </p:txBody>
+      </p:sp>
+    </p:spTree>
+  </p:cSld>
+  <p:clrMapOvr>
+    <a:masterClrMapping/>
+  </p:clrMapOvr>
+</p:sld>
+</file>
+
+<file path=ppt/slides/slide12.xml><?xml version="1.0" encoding="utf-8"?>
+<p:sld xmlns:a="http://schemas.openxmlformats.org/drawingml/2006/main" xmlns:p="http://schemas.openxmlformats.org/presentationml/2006/main" xmlns:r="http://schemas.openxmlformats.org/officeDocument/2006/relationships">
+  <p:cSld>
+    <p:bg>
+      <p:bgPr>
+        <a:solidFill>
+          <a:srgbClr val="764BA2"/>
+        </a:solidFill>
+        <a:effectLst/>
+      </p:bgPr>
+    </p:bg>
+    <p:spTree>
+      <p:nvGrpSpPr>
+        <p:cNvPr id="1" name=""/>
+        <p:cNvGrpSpPr/>
+        <p:nvPr/>
+      </p:nvGrpSpPr>
+      <p:grpSpPr/>
+      <p:sp>
+        <p:nvSpPr>
+          <p:cNvPr id="2" name="TextBox 1"/>
+          <p:cNvSpPr txBox="1"/>
+          <p:nvPr/>
+        </p:nvSpPr>
+        <p:spPr>
+          <a:xfrm>
+            <a:off x="457200" y="1828800"/>
+            <a:ext cx="8229600" cy="1371600"/>
+          </a:xfrm>
+          <a:prstGeom prst="rect">
+            <a:avLst/>
+          </a:prstGeom>
+          <a:noFill/>
+        </p:spPr>
+        <p:txBody>
+          <a:bodyPr wrap="none">
+            <a:spAutoFit/>
+          </a:bodyPr>
+          <a:lstStyle/>
+          <a:p>
+            <a:pPr>
+              <a:defRPr sz="5400" b="1">
+                <a:solidFill>
+                  <a:srgbClr val="FFFFFF"/>
+                </a:solidFill>
+              </a:defRPr>
+            </a:pPr>
+            <a:r>
+              <a:t>Next Steps</a:t>
+            </a:r>
+          </a:p>
+        </p:txBody>
+      </p:sp>
+      <p:sp>
+        <p:nvSpPr>
+          <p:cNvPr id="3" name="TextBox 2"/>
+          <p:cNvSpPr txBox="1"/>
+          <p:nvPr/>
+        </p:nvSpPr>
+        <p:spPr>
+          <a:xfrm>
+            <a:off x="457200" y="3474720"/>
+            <a:ext cx="8229600" cy="2743200"/>
+          </a:xfrm>
+          <a:prstGeom prst="rect">
+            <a:avLst/>
+          </a:prstGeom>
+          <a:noFill/>
+        </p:spPr>
+        <p:txBody>
+          <a:bodyPr wrap="square">
+            <a:spAutoFit/>
+          </a:bodyPr>
+          <a:lstStyle/>
+          <a:p>
+            <a:pPr>
+              <a:spcBef>
+                <a:spcPts val="1000"/>
+              </a:spcBef>
+              <a:defRPr sz="2000">
+                <a:solidFill>
+                  <a:srgbClr val="FFFFFF"/>
+                </a:solidFill>
+              </a:defRPr>
+            </a:pPr>
+            <a:r>
+              <a:t>📄 Download the full PDF report</a:t>
+            </a:r>
+          </a:p>
+          <a:p>
+            <a:pPr>
+              <a:spcBef>
+                <a:spcPts val="1000"/>
+              </a:spcBef>
+              <a:defRPr sz="2000">
+                <a:solidFill>
+                  <a:srgbClr val="FFFFFF"/>
+                </a:solidFill>
+              </a:defRPr>
+            </a:pPr>
+            <a:r>
+              <a:t>🎤 Listen to the audio podcast</a:t>
+            </a:r>
+          </a:p>
+          <a:p>
+            <a:pPr>
+              <a:spcBef>
+                <a:spcPts val="1000"/>
+              </a:spcBef>
+              <a:defRPr sz="2000">
+                <a:solidFill>
+                  <a:srgbClr val="FFFFFF"/>
+                </a:solidFill>
+              </a:defRPr>
+            </a:pPr>
+            <a:r>
+              <a:t>📊 View detailed analysis dashboard</a:t>
+            </a:r>
+          </a:p>
+          <a:p>
+            <a:pPr>
+              <a:spcBef>
+                <a:spcPts val="1000"/>
+              </a:spcBef>
+              <a:defRPr sz="2000">
+                <a:solidFill>
+                  <a:srgbClr val="FFFFFF"/>
+                </a:solidFill>
+              </a:defRPr>
+            </a:pPr>
+            <a:r>
+              <a:t>🔗 Access all paper resources</a:t>
             </a:r>
           </a:p>
         </p:txBody>
@@ -3305,7 +3854,7 @@
               </a:defRPr>
             </a:pPr>
             <a:r>
-              <a:t>📊 Total Papers: 3</a:t>
+              <a:t>📊 Total Papers: 6</a:t>
             </a:r>
           </a:p>
           <a:p>
@@ -3335,7 +3884,7 @@
               </a:defRPr>
             </a:pPr>
             <a:r>
-              <a:t>📱 Mobile Papers: 3</a:t>
+              <a:t>📱 Mobile Papers: 4</a:t>
             </a:r>
           </a:p>
           <a:p>
@@ -3350,7 +3899,7 @@
               </a:defRPr>
             </a:pPr>
             <a:r>
-              <a:t>💻 Laptop Papers: 0</a:t>
+              <a:t>💻 Laptop Papers: 1</a:t>
             </a:r>
           </a:p>
           <a:p>
@@ -3496,22 +4045,22 @@
               </a:defRPr>
             </a:pPr>
             <a:r>
+              <a:t>   • Pruning: 1 papers</a:t>
+            </a:r>
+          </a:p>
+          <a:p>
+            <a:pPr>
+              <a:spcBef>
+                <a:spcPts val="600"/>
+              </a:spcBef>
+              <a:defRPr sz="1800">
+                <a:solidFill>
+                  <a:srgbClr val="2D3748"/>
+                </a:solidFill>
+              </a:defRPr>
+            </a:pPr>
+            <a:r>
               <a:t>   • Distillation: 1 papers</a:t>
-            </a:r>
-          </a:p>
-          <a:p>
-            <a:pPr>
-              <a:spcBef>
-                <a:spcPts val="600"/>
-              </a:spcBef>
-              <a:defRPr sz="1800">
-                <a:solidFill>
-                  <a:srgbClr val="2D3748"/>
-                </a:solidFill>
-              </a:defRPr>
-            </a:pPr>
-            <a:r>
-              <a:t>   • Quantization+Pruning: 1 papers</a:t>
             </a:r>
           </a:p>
           <a:p>
@@ -3741,7 +4290,7 @@
               </a:defRPr>
             </a:pPr>
             <a:r>
-              <a:t>INT8 reduces DRAM bandwidth by 75% with minimal accuracy loss</a:t>
+              <a:t>INT8 reduces DRAM bandwidth by 75% with negligible accuracy loss</a:t>
             </a:r>
           </a:p>
           <a:p>
@@ -3783,7 +4332,7 @@
               </a:defRPr>
             </a:pPr>
             <a:r>
-              <a:t>Implement INT8 quantization for 4x speedup on mobile</a:t>
+              <a:t>Implement INT8 quantization for immediate 4x speedup in mobile</a:t>
             </a:r>
           </a:p>
         </p:txBody>
@@ -3829,7 +4378,7 @@
               </a:defRPr>
             </a:pPr>
             <a:r>
-              <a:t>#2: On-Device LLM Inference: KV Cache Optimization</a:t>
+              <a:t>#2: On-Device LLM Inference: Techniques and Trade-offs</a:t>
             </a:r>
           </a:p>
         </p:txBody>
@@ -3941,7 +4490,7 @@
               </a:defRPr>
             </a:pPr>
             <a:r>
-              <a:t>Batching and caching reduce latency by 60%</a:t>
+              <a:t>Batching and caching reduce inference latency by 60%</a:t>
             </a:r>
           </a:p>
           <a:p>
@@ -4029,7 +4578,7 @@
               </a:defRPr>
             </a:pPr>
             <a:r>
-              <a:t>#3: Knowledge Distillation for Mobile Models: 6x Compr</a:t>
+              <a:t>#3: Structured Pruning for Edge AI: A Comprehensive St</a:t>
             </a:r>
           </a:p>
         </p:txBody>
@@ -4084,7 +4633,7 @@
               </a:defRPr>
             </a:pPr>
             <a:r>
-              <a:t>Score: 0.89/100 | Platform: Mobile | Model: BERT</a:t>
+              <a:t>Score: 0.92/100 | Platform: Edge | Model: CNN</a:t>
             </a:r>
           </a:p>
           <a:p>
@@ -4099,7 +4648,7 @@
               </a:defRPr>
             </a:pPr>
             <a:r>
-              <a:t>DRAM Impact: Low</a:t>
+              <a:t>DRAM Impact: Medium</a:t>
             </a:r>
           </a:p>
           <a:p>
@@ -4141,7 +4690,7 @@
               </a:defRPr>
             </a:pPr>
             <a:r>
-              <a:t>Student models 6x smaller than teacher with 95% accuracy retention</a:t>
+              <a:t>Achieve 50% model sparsity with structured pruning</a:t>
             </a:r>
           </a:p>
           <a:p>
@@ -4183,7 +4732,7 @@
               </a:defRPr>
             </a:pPr>
             <a:r>
-              <a:t>Deploy knowledge distillation pipelines in production</a:t>
+              <a:t>Use fine-grained structured pruning for edge optimization</a:t>
             </a:r>
           </a:p>
         </p:txBody>
@@ -4222,14 +4771,14 @@
           <a:lstStyle/>
           <a:p>
             <a:pPr>
-              <a:defRPr sz="4400">
+              <a:defRPr sz="3200">
                 <a:solidFill>
                   <a:srgbClr val="667EEA"/>
                 </a:solidFill>
               </a:defRPr>
             </a:pPr>
             <a:r>
-              <a:t>Research Trends</a:t>
+              <a:t>#4: Knowledge Distillation for Efficient Mobile Models</a:t>
             </a:r>
           </a:p>
         </p:txBody>
@@ -4259,8 +4808,8 @@
         </p:nvSpPr>
         <p:spPr>
           <a:xfrm>
-            <a:off x="457200" y="1645920"/>
-            <a:ext cx="8229600" cy="4572000"/>
+            <a:off x="457200" y="1371600"/>
+            <a:ext cx="8229600" cy="5029200"/>
           </a:xfrm>
           <a:prstGeom prst="rect">
             <a:avLst/>
@@ -4275,118 +4824,115 @@
           <a:p>
             <a:pPr>
               <a:spcBef>
-                <a:spcPts val="600"/>
-              </a:spcBef>
-              <a:defRPr sz="1800">
-                <a:solidFill>
-                  <a:srgbClr val="2D3748"/>
-                </a:solidFill>
-              </a:defRPr>
-            </a:pPr>
-            <a:r>
-              <a:t>📈 Most Active Sources:</a:t>
-            </a:r>
-          </a:p>
-          <a:p>
-            <a:pPr>
-              <a:spcBef>
-                <a:spcPts val="600"/>
-              </a:spcBef>
-              <a:defRPr sz="1800">
-                <a:solidFill>
-                  <a:srgbClr val="2D3748"/>
-                </a:solidFill>
-              </a:defRPr>
-            </a:pPr>
-            <a:r>
-              <a:t>   • Papers with Code: 2 papers</a:t>
-            </a:r>
-          </a:p>
-          <a:p>
-            <a:pPr>
-              <a:spcBef>
-                <a:spcPts val="600"/>
-              </a:spcBef>
-              <a:defRPr sz="1800">
-                <a:solidFill>
-                  <a:srgbClr val="2D3748"/>
-                </a:solidFill>
-              </a:defRPr>
-            </a:pPr>
-            <a:r>
-              <a:t>   • arXiv: 1 papers</a:t>
-            </a:r>
-          </a:p>
-          <a:p>
-            <a:pPr>
-              <a:spcBef>
-                <a:spcPts val="600"/>
-              </a:spcBef>
-              <a:defRPr sz="1800">
-                <a:solidFill>
-                  <a:srgbClr val="2D3748"/>
-                </a:solidFill>
-              </a:defRPr>
-            </a:pPr>
-          </a:p>
-          <a:p>
-            <a:pPr>
-              <a:spcBef>
-                <a:spcPts val="600"/>
-              </a:spcBef>
-              <a:defRPr sz="1800">
-                <a:solidFill>
-                  <a:srgbClr val="2D3748"/>
-                </a:solidFill>
-              </a:defRPr>
-            </a:pPr>
-            <a:r>
-              <a:t>🔮 Emerging Patterns:</a:t>
-            </a:r>
-          </a:p>
-          <a:p>
-            <a:pPr>
-              <a:spcBef>
-                <a:spcPts val="600"/>
-              </a:spcBef>
-              <a:defRPr sz="1800">
-                <a:solidFill>
-                  <a:srgbClr val="2D3748"/>
-                </a:solidFill>
-              </a:defRPr>
-            </a:pPr>
-            <a:r>
-              <a:t>   • Increasing focus on edge device optimization</a:t>
-            </a:r>
-          </a:p>
-          <a:p>
-            <a:pPr>
-              <a:spcBef>
-                <a:spcPts val="600"/>
-              </a:spcBef>
-              <a:defRPr sz="1800">
-                <a:solidFill>
-                  <a:srgbClr val="2D3748"/>
-                </a:solidFill>
-              </a:defRPr>
-            </a:pPr>
-            <a:r>
-              <a:t>   • Memory efficiency is the top priority</a:t>
-            </a:r>
-          </a:p>
-          <a:p>
-            <a:pPr>
-              <a:spcBef>
-                <a:spcPts val="600"/>
-              </a:spcBef>
-              <a:defRPr sz="1800">
-                <a:solidFill>
-                  <a:srgbClr val="2D3748"/>
-                </a:solidFill>
-              </a:defRPr>
-            </a:pPr>
-            <a:r>
-              <a:t>   • Cross-platform compatibility studies growing</a:t>
+                <a:spcPts val="400"/>
+              </a:spcBef>
+              <a:defRPr sz="1600" b="1">
+                <a:solidFill>
+                  <a:srgbClr val="2D3748"/>
+                </a:solidFill>
+              </a:defRPr>
+            </a:pPr>
+            <a:r>
+              <a:t>Score: 0.89/100 | Platform: Mobile | Model: BERT</a:t>
+            </a:r>
+          </a:p>
+          <a:p>
+            <a:pPr>
+              <a:spcBef>
+                <a:spcPts val="400"/>
+              </a:spcBef>
+              <a:defRPr sz="1600">
+                <a:solidFill>
+                  <a:srgbClr val="2D3748"/>
+                </a:solidFill>
+              </a:defRPr>
+            </a:pPr>
+            <a:r>
+              <a:t>DRAM Impact: Low</a:t>
+            </a:r>
+          </a:p>
+          <a:p>
+            <a:pPr>
+              <a:spcBef>
+                <a:spcPts val="400"/>
+              </a:spcBef>
+              <a:defRPr sz="1600" b="1">
+                <a:solidFill>
+                  <a:srgbClr val="2D3748"/>
+                </a:solidFill>
+              </a:defRPr>
+            </a:pPr>
+          </a:p>
+          <a:p>
+            <a:pPr>
+              <a:spcBef>
+                <a:spcPts val="400"/>
+              </a:spcBef>
+              <a:defRPr sz="1600">
+                <a:solidFill>
+                  <a:srgbClr val="2D3748"/>
+                </a:solidFill>
+              </a:defRPr>
+            </a:pPr>
+            <a:r>
+              <a:t>💾 Memory Insight:</a:t>
+            </a:r>
+          </a:p>
+          <a:p>
+            <a:pPr>
+              <a:spcBef>
+                <a:spcPts val="400"/>
+              </a:spcBef>
+              <a:defRPr sz="1600" b="1">
+                <a:solidFill>
+                  <a:srgbClr val="2D3748"/>
+                </a:solidFill>
+              </a:defRPr>
+            </a:pPr>
+            <a:r>
+              <a:t>Student models 6x smaller than teacher with 95% accuracy retention</a:t>
+            </a:r>
+          </a:p>
+          <a:p>
+            <a:pPr>
+              <a:spcBef>
+                <a:spcPts val="400"/>
+              </a:spcBef>
+              <a:defRPr sz="1600">
+                <a:solidFill>
+                  <a:srgbClr val="2D3748"/>
+                </a:solidFill>
+              </a:defRPr>
+            </a:pPr>
+          </a:p>
+          <a:p>
+            <a:pPr>
+              <a:spcBef>
+                <a:spcPts val="400"/>
+              </a:spcBef>
+              <a:defRPr sz="1600" b="1">
+                <a:solidFill>
+                  <a:srgbClr val="2D3748"/>
+                </a:solidFill>
+              </a:defRPr>
+            </a:pPr>
+            <a:r>
+              <a:t>⚙️ Engineering Takeaway:</a:t>
+            </a:r>
+          </a:p>
+          <a:p>
+            <a:pPr>
+              <a:spcBef>
+                <a:spcPts val="400"/>
+              </a:spcBef>
+              <a:defRPr sz="1600">
+                <a:solidFill>
+                  <a:srgbClr val="2D3748"/>
+                </a:solidFill>
+              </a:defRPr>
+            </a:pPr>
+            <a:r>
+              <a:t>Implement knowledge distillation pipelines in production</a:t>
             </a:r>
           </a:p>
         </p:txBody>
@@ -4425,14 +4971,14 @@
           <a:lstStyle/>
           <a:p>
             <a:pPr>
-              <a:defRPr sz="4400">
+              <a:defRPr sz="3200">
                 <a:solidFill>
                   <a:srgbClr val="667EEA"/>
                 </a:solidFill>
               </a:defRPr>
             </a:pPr>
             <a:r>
-              <a:t>Sources (3 total)</a:t>
+              <a:t>#5: Mixed Precision Training for Efficient Inference</a:t>
             </a:r>
           </a:p>
         </p:txBody>
@@ -4463,7 +5009,7 @@
         <p:spPr>
           <a:xfrm>
             <a:off x="457200" y="1371600"/>
-            <a:ext cx="4114800" cy="5029200"/>
+            <a:ext cx="8229600" cy="5029200"/>
           </a:xfrm>
           <a:prstGeom prst="rect">
             <a:avLst/>
@@ -4480,14 +5026,14 @@
               <a:spcBef>
                 <a:spcPts val="400"/>
               </a:spcBef>
-              <a:defRPr sz="1100">
-                <a:solidFill>
-                  <a:srgbClr val="2D3748"/>
-                </a:solidFill>
-              </a:defRPr>
-            </a:pPr>
-            <a:r>
-              <a:t>1. INT8 Quantization: Achieving 4x Model Compres (arXiv) - 1</a:t>
+              <a:defRPr sz="1600" b="1">
+                <a:solidFill>
+                  <a:srgbClr val="2D3748"/>
+                </a:solidFill>
+              </a:defRPr>
+            </a:pPr>
+            <a:r>
+              <a:t>Score: 0.88/100 | Platform: Laptop | Model: ResNet</a:t>
             </a:r>
           </a:p>
           <a:p>
@@ -4495,52 +5041,98 @@
               <a:spcBef>
                 <a:spcPts val="400"/>
               </a:spcBef>
-              <a:defRPr sz="1100">
-                <a:solidFill>
-                  <a:srgbClr val="2D3748"/>
-                </a:solidFill>
-              </a:defRPr>
-            </a:pPr>
-            <a:r>
-              <a:t>2. On-Device LLM Inference: KV Cache Optimizatio (Papers with Code) - 1</a:t>
-            </a:r>
-          </a:p>
-        </p:txBody>
-      </p:sp>
-      <p:sp>
-        <p:nvSpPr>
-          <p:cNvPr id="5" name="TextBox 4"/>
-          <p:cNvSpPr txBox="1"/>
-          <p:nvPr/>
-        </p:nvSpPr>
-        <p:spPr>
-          <a:xfrm>
-            <a:off x="4754880" y="1371600"/>
-            <a:ext cx="4114800" cy="5029200"/>
-          </a:xfrm>
-          <a:prstGeom prst="rect">
-            <a:avLst/>
-          </a:prstGeom>
-          <a:noFill/>
-        </p:spPr>
-        <p:txBody>
-          <a:bodyPr wrap="square">
-            <a:spAutoFit/>
-          </a:bodyPr>
-          <a:lstStyle/>
+              <a:defRPr sz="1600">
+                <a:solidFill>
+                  <a:srgbClr val="2D3748"/>
+                </a:solidFill>
+              </a:defRPr>
+            </a:pPr>
+            <a:r>
+              <a:t>DRAM Impact: Medium</a:t>
+            </a:r>
+          </a:p>
           <a:p>
             <a:pPr>
               <a:spcBef>
                 <a:spcPts val="400"/>
               </a:spcBef>
-              <a:defRPr sz="1100">
-                <a:solidFill>
-                  <a:srgbClr val="2D3748"/>
-                </a:solidFill>
-              </a:defRPr>
-            </a:pPr>
-            <a:r>
-              <a:t>3. Knowledge Distillation for Mobile Models: 6x  (Papers with Code) - 1</a:t>
+              <a:defRPr sz="1600" b="1">
+                <a:solidFill>
+                  <a:srgbClr val="2D3748"/>
+                </a:solidFill>
+              </a:defRPr>
+            </a:pPr>
+          </a:p>
+          <a:p>
+            <a:pPr>
+              <a:spcBef>
+                <a:spcPts val="400"/>
+              </a:spcBef>
+              <a:defRPr sz="1600">
+                <a:solidFill>
+                  <a:srgbClr val="2D3748"/>
+                </a:solidFill>
+              </a:defRPr>
+            </a:pPr>
+            <a:r>
+              <a:t>💾 Memory Insight:</a:t>
+            </a:r>
+          </a:p>
+          <a:p>
+            <a:pPr>
+              <a:spcBef>
+                <a:spcPts val="400"/>
+              </a:spcBef>
+              <a:defRPr sz="1600" b="1">
+                <a:solidFill>
+                  <a:srgbClr val="2D3748"/>
+                </a:solidFill>
+              </a:defRPr>
+            </a:pPr>
+            <a:r>
+              <a:t>Mixed precision reduces memory consumption by 40%</a:t>
+            </a:r>
+          </a:p>
+          <a:p>
+            <a:pPr>
+              <a:spcBef>
+                <a:spcPts val="400"/>
+              </a:spcBef>
+              <a:defRPr sz="1600">
+                <a:solidFill>
+                  <a:srgbClr val="2D3748"/>
+                </a:solidFill>
+              </a:defRPr>
+            </a:pPr>
+          </a:p>
+          <a:p>
+            <a:pPr>
+              <a:spcBef>
+                <a:spcPts val="400"/>
+              </a:spcBef>
+              <a:defRPr sz="1600" b="1">
+                <a:solidFill>
+                  <a:srgbClr val="2D3748"/>
+                </a:solidFill>
+              </a:defRPr>
+            </a:pPr>
+            <a:r>
+              <a:t>⚙️ Engineering Takeaway:</a:t>
+            </a:r>
+          </a:p>
+          <a:p>
+            <a:pPr>
+              <a:spcBef>
+                <a:spcPts val="400"/>
+              </a:spcBef>
+              <a:defRPr sz="1600">
+                <a:solidFill>
+                  <a:srgbClr val="2D3748"/>
+                </a:solidFill>
+              </a:defRPr>
+            </a:pPr>
+            <a:r>
+              <a:t>Use mixed precision for training and inference</a:t>
             </a:r>
           </a:p>
         </p:txBody>
@@ -4556,14 +5148,6 @@
 <file path=ppt/slides/slide9.xml><?xml version="1.0" encoding="utf-8"?>
 <p:sld xmlns:a="http://schemas.openxmlformats.org/drawingml/2006/main" xmlns:p="http://schemas.openxmlformats.org/presentationml/2006/main" xmlns:r="http://schemas.openxmlformats.org/officeDocument/2006/relationships">
   <p:cSld>
-    <p:bg>
-      <p:bgPr>
-        <a:solidFill>
-          <a:srgbClr val="764BA2"/>
-        </a:solidFill>
-        <a:effectLst/>
-      </p:bgPr>
-    </p:bg>
     <p:spTree>
       <p:nvGrpSpPr>
         <p:cNvPr id="1" name=""/>
@@ -4573,14 +5157,59 @@
       <p:grpSpPr/>
       <p:sp>
         <p:nvSpPr>
-          <p:cNvPr id="2" name="TextBox 1"/>
+          <p:cNvPr id="2" name="Title 1"/>
+          <p:cNvSpPr>
+            <a:spLocks noGrp="1"/>
+          </p:cNvSpPr>
+          <p:nvPr>
+            <p:ph type="title"/>
+          </p:nvPr>
+        </p:nvSpPr>
+        <p:spPr/>
+        <p:txBody>
+          <a:bodyPr/>
+          <a:lstStyle/>
+          <a:p>
+            <a:pPr>
+              <a:defRPr sz="3200">
+                <a:solidFill>
+                  <a:srgbClr val="667EEA"/>
+                </a:solidFill>
+              </a:defRPr>
+            </a:pPr>
+            <a:r>
+              <a:t>#6: Neural Architecture Search for Efficient Mobile Mo</a:t>
+            </a:r>
+          </a:p>
+        </p:txBody>
+      </p:sp>
+      <p:sp>
+        <p:nvSpPr>
+          <p:cNvPr id="3" name="Content Placeholder 2"/>
+          <p:cNvSpPr>
+            <a:spLocks noGrp="1"/>
+          </p:cNvSpPr>
+          <p:nvPr>
+            <p:ph idx="1"/>
+          </p:nvPr>
+        </p:nvSpPr>
+        <p:spPr/>
+        <p:txBody>
+          <a:bodyPr/>
+          <a:lstStyle/>
+          <a:p/>
+        </p:txBody>
+      </p:sp>
+      <p:sp>
+        <p:nvSpPr>
+          <p:cNvPr id="4" name="TextBox 3"/>
           <p:cNvSpPr txBox="1"/>
           <p:nvPr/>
         </p:nvSpPr>
         <p:spPr>
           <a:xfrm>
-            <a:off x="457200" y="1828800"/>
-            <a:ext cx="8229600" cy="1371600"/>
+            <a:off x="457200" y="1371600"/>
+            <a:ext cx="8229600" cy="5029200"/>
           </a:xfrm>
           <a:prstGeom prst="rect">
             <a:avLst/>
@@ -4588,41 +5217,6 @@
           <a:noFill/>
         </p:spPr>
         <p:txBody>
-          <a:bodyPr wrap="none">
-            <a:spAutoFit/>
-          </a:bodyPr>
-          <a:lstStyle/>
-          <a:p>
-            <a:pPr>
-              <a:defRPr sz="5400" b="1">
-                <a:solidFill>
-                  <a:srgbClr val="FFFFFF"/>
-                </a:solidFill>
-              </a:defRPr>
-            </a:pPr>
-            <a:r>
-              <a:t>Next Steps</a:t>
-            </a:r>
-          </a:p>
-        </p:txBody>
-      </p:sp>
-      <p:sp>
-        <p:nvSpPr>
-          <p:cNvPr id="3" name="TextBox 2"/>
-          <p:cNvSpPr txBox="1"/>
-          <p:nvPr/>
-        </p:nvSpPr>
-        <p:spPr>
-          <a:xfrm>
-            <a:off x="457200" y="3474720"/>
-            <a:ext cx="8229600" cy="2743200"/>
-          </a:xfrm>
-          <a:prstGeom prst="rect">
-            <a:avLst/>
-          </a:prstGeom>
-          <a:noFill/>
-        </p:spPr>
-        <p:txBody>
           <a:bodyPr wrap="square">
             <a:spAutoFit/>
           </a:bodyPr>
@@ -4630,61 +5224,115 @@
           <a:p>
             <a:pPr>
               <a:spcBef>
-                <a:spcPts val="1000"/>
-              </a:spcBef>
-              <a:defRPr sz="2000">
-                <a:solidFill>
-                  <a:srgbClr val="FFFFFF"/>
-                </a:solidFill>
-              </a:defRPr>
-            </a:pPr>
-            <a:r>
-              <a:t>📄 Download the full PDF report</a:t>
-            </a:r>
-          </a:p>
-          <a:p>
-            <a:pPr>
-              <a:spcBef>
-                <a:spcPts val="1000"/>
-              </a:spcBef>
-              <a:defRPr sz="2000">
-                <a:solidFill>
-                  <a:srgbClr val="FFFFFF"/>
-                </a:solidFill>
-              </a:defRPr>
-            </a:pPr>
-            <a:r>
-              <a:t>🎤 Listen to the audio podcast</a:t>
-            </a:r>
-          </a:p>
-          <a:p>
-            <a:pPr>
-              <a:spcBef>
-                <a:spcPts val="1000"/>
-              </a:spcBef>
-              <a:defRPr sz="2000">
-                <a:solidFill>
-                  <a:srgbClr val="FFFFFF"/>
-                </a:solidFill>
-              </a:defRPr>
-            </a:pPr>
-            <a:r>
-              <a:t>📊 View detailed analysis dashboard</a:t>
-            </a:r>
-          </a:p>
-          <a:p>
-            <a:pPr>
-              <a:spcBef>
-                <a:spcPts val="1000"/>
-              </a:spcBef>
-              <a:defRPr sz="2000">
-                <a:solidFill>
-                  <a:srgbClr val="FFFFFF"/>
-                </a:solidFill>
-              </a:defRPr>
-            </a:pPr>
-            <a:r>
-              <a:t>🔗 Access all paper resources</a:t>
+                <a:spcPts val="400"/>
+              </a:spcBef>
+              <a:defRPr sz="1600" b="1">
+                <a:solidFill>
+                  <a:srgbClr val="2D3748"/>
+                </a:solidFill>
+              </a:defRPr>
+            </a:pPr>
+            <a:r>
+              <a:t>Score: 0.86/100 | Platform: Mobile | Model: MobileNet</a:t>
+            </a:r>
+          </a:p>
+          <a:p>
+            <a:pPr>
+              <a:spcBef>
+                <a:spcPts val="400"/>
+              </a:spcBef>
+              <a:defRPr sz="1600">
+                <a:solidFill>
+                  <a:srgbClr val="2D3748"/>
+                </a:solidFill>
+              </a:defRPr>
+            </a:pPr>
+            <a:r>
+              <a:t>DRAM Impact: Medium</a:t>
+            </a:r>
+          </a:p>
+          <a:p>
+            <a:pPr>
+              <a:spcBef>
+                <a:spcPts val="400"/>
+              </a:spcBef>
+              <a:defRPr sz="1600" b="1">
+                <a:solidFill>
+                  <a:srgbClr val="2D3748"/>
+                </a:solidFill>
+              </a:defRPr>
+            </a:pPr>
+          </a:p>
+          <a:p>
+            <a:pPr>
+              <a:spcBef>
+                <a:spcPts val="400"/>
+              </a:spcBef>
+              <a:defRPr sz="1600">
+                <a:solidFill>
+                  <a:srgbClr val="2D3748"/>
+                </a:solidFill>
+              </a:defRPr>
+            </a:pPr>
+            <a:r>
+              <a:t>💾 Memory Insight:</a:t>
+            </a:r>
+          </a:p>
+          <a:p>
+            <a:pPr>
+              <a:spcBef>
+                <a:spcPts val="400"/>
+              </a:spcBef>
+              <a:defRPr sz="1600" b="1">
+                <a:solidFill>
+                  <a:srgbClr val="2D3748"/>
+                </a:solidFill>
+              </a:defRPr>
+            </a:pPr>
+            <a:r>
+              <a:t>NAS-discovered models are 40% smaller than hand-designed</a:t>
+            </a:r>
+          </a:p>
+          <a:p>
+            <a:pPr>
+              <a:spcBef>
+                <a:spcPts val="400"/>
+              </a:spcBef>
+              <a:defRPr sz="1600">
+                <a:solidFill>
+                  <a:srgbClr val="2D3748"/>
+                </a:solidFill>
+              </a:defRPr>
+            </a:pPr>
+          </a:p>
+          <a:p>
+            <a:pPr>
+              <a:spcBef>
+                <a:spcPts val="400"/>
+              </a:spcBef>
+              <a:defRPr sz="1600" b="1">
+                <a:solidFill>
+                  <a:srgbClr val="2D3748"/>
+                </a:solidFill>
+              </a:defRPr>
+            </a:pPr>
+            <a:r>
+              <a:t>⚙️ Engineering Takeaway:</a:t>
+            </a:r>
+          </a:p>
+          <a:p>
+            <a:pPr>
+              <a:spcBef>
+                <a:spcPts val="400"/>
+              </a:spcBef>
+              <a:defRPr sz="1600">
+                <a:solidFill>
+                  <a:srgbClr val="2D3748"/>
+                </a:solidFill>
+              </a:defRPr>
+            </a:pPr>
+            <a:r>
+              <a:t>Deploy NAS-discovered architectures for efficiency</a:t>
             </a:r>
           </a:p>
         </p:txBody>

--- a/results/reports/report.pptx
+++ b/results/reports/report.pptx
@@ -13,10 +13,6 @@
     <p:sldId id="261" r:id="rId12"/>
     <p:sldId id="262" r:id="rId13"/>
     <p:sldId id="263" r:id="rId14"/>
-    <p:sldId id="264" r:id="rId15"/>
-    <p:sldId id="265" r:id="rId16"/>
-    <p:sldId id="266" r:id="rId17"/>
-    <p:sldId id="267" r:id="rId18"/>
   </p:sldIdLst>
   <p:sldSz cx="9144000" cy="6858000" type="screen4x3"/>
   <p:notesSz cx="6858000" cy="9144000"/>
@@ -3172,7 +3168,7 @@
               </a:defRPr>
             </a:pPr>
             <a:r>
-              <a:t>Research Intelligence Report • March 11, 2026</a:t>
+              <a:t>Research Intelligence Report • March 12, 2026</a:t>
             </a:r>
           </a:p>
         </p:txBody>
@@ -3207,553 +3203,7 @@
               </a:defRPr>
             </a:pPr>
             <a:r>
-              <a:t>6 Papers Analyzed • Hybrid RAG + Multi-Model AI</a:t>
-            </a:r>
-          </a:p>
-        </p:txBody>
-      </p:sp>
-    </p:spTree>
-  </p:cSld>
-  <p:clrMapOvr>
-    <a:masterClrMapping/>
-  </p:clrMapOvr>
-</p:sld>
-</file>
-
-<file path=ppt/slides/slide10.xml><?xml version="1.0" encoding="utf-8"?>
-<p:sld xmlns:a="http://schemas.openxmlformats.org/drawingml/2006/main" xmlns:p="http://schemas.openxmlformats.org/presentationml/2006/main" xmlns:r="http://schemas.openxmlformats.org/officeDocument/2006/relationships">
-  <p:cSld>
-    <p:spTree>
-      <p:nvGrpSpPr>
-        <p:cNvPr id="1" name=""/>
-        <p:cNvGrpSpPr/>
-        <p:nvPr/>
-      </p:nvGrpSpPr>
-      <p:grpSpPr/>
-      <p:sp>
-        <p:nvSpPr>
-          <p:cNvPr id="2" name="Title 1"/>
-          <p:cNvSpPr>
-            <a:spLocks noGrp="1"/>
-          </p:cNvSpPr>
-          <p:nvPr>
-            <p:ph type="title"/>
-          </p:nvPr>
-        </p:nvSpPr>
-        <p:spPr/>
-        <p:txBody>
-          <a:bodyPr/>
-          <a:lstStyle/>
-          <a:p>
-            <a:pPr>
-              <a:defRPr sz="4400">
-                <a:solidFill>
-                  <a:srgbClr val="667EEA"/>
-                </a:solidFill>
-              </a:defRPr>
-            </a:pPr>
-            <a:r>
-              <a:t>Research Trends</a:t>
-            </a:r>
-          </a:p>
-        </p:txBody>
-      </p:sp>
-      <p:sp>
-        <p:nvSpPr>
-          <p:cNvPr id="3" name="Content Placeholder 2"/>
-          <p:cNvSpPr>
-            <a:spLocks noGrp="1"/>
-          </p:cNvSpPr>
-          <p:nvPr>
-            <p:ph idx="1"/>
-          </p:nvPr>
-        </p:nvSpPr>
-        <p:spPr/>
-        <p:txBody>
-          <a:bodyPr/>
-          <a:lstStyle/>
-          <a:p/>
-        </p:txBody>
-      </p:sp>
-      <p:sp>
-        <p:nvSpPr>
-          <p:cNvPr id="4" name="TextBox 3"/>
-          <p:cNvSpPr txBox="1"/>
-          <p:nvPr/>
-        </p:nvSpPr>
-        <p:spPr>
-          <a:xfrm>
-            <a:off x="457200" y="1645920"/>
-            <a:ext cx="8229600" cy="4572000"/>
-          </a:xfrm>
-          <a:prstGeom prst="rect">
-            <a:avLst/>
-          </a:prstGeom>
-          <a:noFill/>
-        </p:spPr>
-        <p:txBody>
-          <a:bodyPr wrap="square">
-            <a:spAutoFit/>
-          </a:bodyPr>
-          <a:lstStyle/>
-          <a:p>
-            <a:pPr>
-              <a:spcBef>
-                <a:spcPts val="600"/>
-              </a:spcBef>
-              <a:defRPr sz="1800">
-                <a:solidFill>
-                  <a:srgbClr val="2D3748"/>
-                </a:solidFill>
-              </a:defRPr>
-            </a:pPr>
-            <a:r>
-              <a:t>📈 Most Active Sources:</a:t>
-            </a:r>
-          </a:p>
-          <a:p>
-            <a:pPr>
-              <a:spcBef>
-                <a:spcPts val="600"/>
-              </a:spcBef>
-              <a:defRPr sz="1800">
-                <a:solidFill>
-                  <a:srgbClr val="2D3748"/>
-                </a:solidFill>
-              </a:defRPr>
-            </a:pPr>
-            <a:r>
-              <a:t>   • arXiv: 4 papers</a:t>
-            </a:r>
-          </a:p>
-          <a:p>
-            <a:pPr>
-              <a:spcBef>
-                <a:spcPts val="600"/>
-              </a:spcBef>
-              <a:defRPr sz="1800">
-                <a:solidFill>
-                  <a:srgbClr val="2D3748"/>
-                </a:solidFill>
-              </a:defRPr>
-            </a:pPr>
-            <a:r>
-              <a:t>   • Papers with Code: 2 papers</a:t>
-            </a:r>
-          </a:p>
-          <a:p>
-            <a:pPr>
-              <a:spcBef>
-                <a:spcPts val="600"/>
-              </a:spcBef>
-              <a:defRPr sz="1800">
-                <a:solidFill>
-                  <a:srgbClr val="2D3748"/>
-                </a:solidFill>
-              </a:defRPr>
-            </a:pPr>
-          </a:p>
-          <a:p>
-            <a:pPr>
-              <a:spcBef>
-                <a:spcPts val="600"/>
-              </a:spcBef>
-              <a:defRPr sz="1800">
-                <a:solidFill>
-                  <a:srgbClr val="2D3748"/>
-                </a:solidFill>
-              </a:defRPr>
-            </a:pPr>
-            <a:r>
-              <a:t>🔮 Emerging Patterns:</a:t>
-            </a:r>
-          </a:p>
-          <a:p>
-            <a:pPr>
-              <a:spcBef>
-                <a:spcPts val="600"/>
-              </a:spcBef>
-              <a:defRPr sz="1800">
-                <a:solidFill>
-                  <a:srgbClr val="2D3748"/>
-                </a:solidFill>
-              </a:defRPr>
-            </a:pPr>
-            <a:r>
-              <a:t>   • Increasing focus on edge device optimization</a:t>
-            </a:r>
-          </a:p>
-          <a:p>
-            <a:pPr>
-              <a:spcBef>
-                <a:spcPts val="600"/>
-              </a:spcBef>
-              <a:defRPr sz="1800">
-                <a:solidFill>
-                  <a:srgbClr val="2D3748"/>
-                </a:solidFill>
-              </a:defRPr>
-            </a:pPr>
-            <a:r>
-              <a:t>   • Memory efficiency is the top priority</a:t>
-            </a:r>
-          </a:p>
-          <a:p>
-            <a:pPr>
-              <a:spcBef>
-                <a:spcPts val="600"/>
-              </a:spcBef>
-              <a:defRPr sz="1800">
-                <a:solidFill>
-                  <a:srgbClr val="2D3748"/>
-                </a:solidFill>
-              </a:defRPr>
-            </a:pPr>
-            <a:r>
-              <a:t>   • Cross-platform compatibility studies growing</a:t>
-            </a:r>
-          </a:p>
-        </p:txBody>
-      </p:sp>
-    </p:spTree>
-  </p:cSld>
-  <p:clrMapOvr>
-    <a:masterClrMapping/>
-  </p:clrMapOvr>
-</p:sld>
-</file>
-
-<file path=ppt/slides/slide11.xml><?xml version="1.0" encoding="utf-8"?>
-<p:sld xmlns:a="http://schemas.openxmlformats.org/drawingml/2006/main" xmlns:p="http://schemas.openxmlformats.org/presentationml/2006/main" xmlns:r="http://schemas.openxmlformats.org/officeDocument/2006/relationships">
-  <p:cSld>
-    <p:spTree>
-      <p:nvGrpSpPr>
-        <p:cNvPr id="1" name=""/>
-        <p:cNvGrpSpPr/>
-        <p:nvPr/>
-      </p:nvGrpSpPr>
-      <p:grpSpPr/>
-      <p:sp>
-        <p:nvSpPr>
-          <p:cNvPr id="2" name="Title 1"/>
-          <p:cNvSpPr>
-            <a:spLocks noGrp="1"/>
-          </p:cNvSpPr>
-          <p:nvPr>
-            <p:ph type="title"/>
-          </p:nvPr>
-        </p:nvSpPr>
-        <p:spPr/>
-        <p:txBody>
-          <a:bodyPr/>
-          <a:lstStyle/>
-          <a:p>
-            <a:pPr>
-              <a:defRPr sz="4400">
-                <a:solidFill>
-                  <a:srgbClr val="667EEA"/>
-                </a:solidFill>
-              </a:defRPr>
-            </a:pPr>
-            <a:r>
-              <a:t>Sources (6 total)</a:t>
-            </a:r>
-          </a:p>
-        </p:txBody>
-      </p:sp>
-      <p:sp>
-        <p:nvSpPr>
-          <p:cNvPr id="3" name="Content Placeholder 2"/>
-          <p:cNvSpPr>
-            <a:spLocks noGrp="1"/>
-          </p:cNvSpPr>
-          <p:nvPr>
-            <p:ph idx="1"/>
-          </p:nvPr>
-        </p:nvSpPr>
-        <p:spPr/>
-        <p:txBody>
-          <a:bodyPr/>
-          <a:lstStyle/>
-          <a:p/>
-        </p:txBody>
-      </p:sp>
-      <p:sp>
-        <p:nvSpPr>
-          <p:cNvPr id="4" name="TextBox 3"/>
-          <p:cNvSpPr txBox="1"/>
-          <p:nvPr/>
-        </p:nvSpPr>
-        <p:spPr>
-          <a:xfrm>
-            <a:off x="457200" y="1371600"/>
-            <a:ext cx="4114800" cy="5029200"/>
-          </a:xfrm>
-          <a:prstGeom prst="rect">
-            <a:avLst/>
-          </a:prstGeom>
-          <a:noFill/>
-        </p:spPr>
-        <p:txBody>
-          <a:bodyPr wrap="square">
-            <a:spAutoFit/>
-          </a:bodyPr>
-          <a:lstStyle/>
-          <a:p>
-            <a:pPr>
-              <a:spcBef>
-                <a:spcPts val="400"/>
-              </a:spcBef>
-              <a:defRPr sz="1100">
-                <a:solidFill>
-                  <a:srgbClr val="2D3748"/>
-                </a:solidFill>
-              </a:defRPr>
-            </a:pPr>
-            <a:r>
-              <a:t>1. INT8 Quantization: Achieving 4x Model Compres (arXiv) - 1</a:t>
-            </a:r>
-          </a:p>
-          <a:p>
-            <a:pPr>
-              <a:spcBef>
-                <a:spcPts val="400"/>
-              </a:spcBef>
-              <a:defRPr sz="1100">
-                <a:solidFill>
-                  <a:srgbClr val="2D3748"/>
-                </a:solidFill>
-              </a:defRPr>
-            </a:pPr>
-            <a:r>
-              <a:t>2. On-Device LLM Inference: Techniques and Trade (Papers with Code) - 1</a:t>
-            </a:r>
-          </a:p>
-          <a:p>
-            <a:pPr>
-              <a:spcBef>
-                <a:spcPts val="400"/>
-              </a:spcBef>
-              <a:defRPr sz="1100">
-                <a:solidFill>
-                  <a:srgbClr val="2D3748"/>
-                </a:solidFill>
-              </a:defRPr>
-            </a:pPr>
-            <a:r>
-              <a:t>3. Structured Pruning for Edge AI: A Comprehensi (arXiv) - 1</a:t>
-            </a:r>
-          </a:p>
-        </p:txBody>
-      </p:sp>
-      <p:sp>
-        <p:nvSpPr>
-          <p:cNvPr id="5" name="TextBox 4"/>
-          <p:cNvSpPr txBox="1"/>
-          <p:nvPr/>
-        </p:nvSpPr>
-        <p:spPr>
-          <a:xfrm>
-            <a:off x="4754880" y="1371600"/>
-            <a:ext cx="4114800" cy="5029200"/>
-          </a:xfrm>
-          <a:prstGeom prst="rect">
-            <a:avLst/>
-          </a:prstGeom>
-          <a:noFill/>
-        </p:spPr>
-        <p:txBody>
-          <a:bodyPr wrap="square">
-            <a:spAutoFit/>
-          </a:bodyPr>
-          <a:lstStyle/>
-          <a:p>
-            <a:pPr>
-              <a:spcBef>
-                <a:spcPts val="400"/>
-              </a:spcBef>
-              <a:defRPr sz="1100">
-                <a:solidFill>
-                  <a:srgbClr val="2D3748"/>
-                </a:solidFill>
-              </a:defRPr>
-            </a:pPr>
-            <a:r>
-              <a:t>4. Knowledge Distillation for Efficient Mobile M (Papers with Code) - 1</a:t>
-            </a:r>
-          </a:p>
-          <a:p>
-            <a:pPr>
-              <a:spcBef>
-                <a:spcPts val="400"/>
-              </a:spcBef>
-              <a:defRPr sz="1100">
-                <a:solidFill>
-                  <a:srgbClr val="2D3748"/>
-                </a:solidFill>
-              </a:defRPr>
-            </a:pPr>
-            <a:r>
-              <a:t>5. Mixed Precision Training for Efficient Infere (arXiv) - 1</a:t>
-            </a:r>
-          </a:p>
-          <a:p>
-            <a:pPr>
-              <a:spcBef>
-                <a:spcPts val="400"/>
-              </a:spcBef>
-              <a:defRPr sz="1100">
-                <a:solidFill>
-                  <a:srgbClr val="2D3748"/>
-                </a:solidFill>
-              </a:defRPr>
-            </a:pPr>
-            <a:r>
-              <a:t>6. Neural Architecture Search for Efficient Mobi (arXiv) - 1</a:t>
-            </a:r>
-          </a:p>
-        </p:txBody>
-      </p:sp>
-    </p:spTree>
-  </p:cSld>
-  <p:clrMapOvr>
-    <a:masterClrMapping/>
-  </p:clrMapOvr>
-</p:sld>
-</file>
-
-<file path=ppt/slides/slide12.xml><?xml version="1.0" encoding="utf-8"?>
-<p:sld xmlns:a="http://schemas.openxmlformats.org/drawingml/2006/main" xmlns:p="http://schemas.openxmlformats.org/presentationml/2006/main" xmlns:r="http://schemas.openxmlformats.org/officeDocument/2006/relationships">
-  <p:cSld>
-    <p:bg>
-      <p:bgPr>
-        <a:solidFill>
-          <a:srgbClr val="764BA2"/>
-        </a:solidFill>
-        <a:effectLst/>
-      </p:bgPr>
-    </p:bg>
-    <p:spTree>
-      <p:nvGrpSpPr>
-        <p:cNvPr id="1" name=""/>
-        <p:cNvGrpSpPr/>
-        <p:nvPr/>
-      </p:nvGrpSpPr>
-      <p:grpSpPr/>
-      <p:sp>
-        <p:nvSpPr>
-          <p:cNvPr id="2" name="TextBox 1"/>
-          <p:cNvSpPr txBox="1"/>
-          <p:nvPr/>
-        </p:nvSpPr>
-        <p:spPr>
-          <a:xfrm>
-            <a:off x="457200" y="1828800"/>
-            <a:ext cx="8229600" cy="1371600"/>
-          </a:xfrm>
-          <a:prstGeom prst="rect">
-            <a:avLst/>
-          </a:prstGeom>
-          <a:noFill/>
-        </p:spPr>
-        <p:txBody>
-          <a:bodyPr wrap="none">
-            <a:spAutoFit/>
-          </a:bodyPr>
-          <a:lstStyle/>
-          <a:p>
-            <a:pPr>
-              <a:defRPr sz="5400" b="1">
-                <a:solidFill>
-                  <a:srgbClr val="FFFFFF"/>
-                </a:solidFill>
-              </a:defRPr>
-            </a:pPr>
-            <a:r>
-              <a:t>Next Steps</a:t>
-            </a:r>
-          </a:p>
-        </p:txBody>
-      </p:sp>
-      <p:sp>
-        <p:nvSpPr>
-          <p:cNvPr id="3" name="TextBox 2"/>
-          <p:cNvSpPr txBox="1"/>
-          <p:nvPr/>
-        </p:nvSpPr>
-        <p:spPr>
-          <a:xfrm>
-            <a:off x="457200" y="3474720"/>
-            <a:ext cx="8229600" cy="2743200"/>
-          </a:xfrm>
-          <a:prstGeom prst="rect">
-            <a:avLst/>
-          </a:prstGeom>
-          <a:noFill/>
-        </p:spPr>
-        <p:txBody>
-          <a:bodyPr wrap="square">
-            <a:spAutoFit/>
-          </a:bodyPr>
-          <a:lstStyle/>
-          <a:p>
-            <a:pPr>
-              <a:spcBef>
-                <a:spcPts val="1000"/>
-              </a:spcBef>
-              <a:defRPr sz="2000">
-                <a:solidFill>
-                  <a:srgbClr val="FFFFFF"/>
-                </a:solidFill>
-              </a:defRPr>
-            </a:pPr>
-            <a:r>
-              <a:t>📄 Download the full PDF report</a:t>
-            </a:r>
-          </a:p>
-          <a:p>
-            <a:pPr>
-              <a:spcBef>
-                <a:spcPts val="1000"/>
-              </a:spcBef>
-              <a:defRPr sz="2000">
-                <a:solidFill>
-                  <a:srgbClr val="FFFFFF"/>
-                </a:solidFill>
-              </a:defRPr>
-            </a:pPr>
-            <a:r>
-              <a:t>🎤 Listen to the audio podcast</a:t>
-            </a:r>
-          </a:p>
-          <a:p>
-            <a:pPr>
-              <a:spcBef>
-                <a:spcPts val="1000"/>
-              </a:spcBef>
-              <a:defRPr sz="2000">
-                <a:solidFill>
-                  <a:srgbClr val="FFFFFF"/>
-                </a:solidFill>
-              </a:defRPr>
-            </a:pPr>
-            <a:r>
-              <a:t>📊 View detailed analysis dashboard</a:t>
-            </a:r>
-          </a:p>
-          <a:p>
-            <a:pPr>
-              <a:spcBef>
-                <a:spcPts val="1000"/>
-              </a:spcBef>
-              <a:defRPr sz="2000">
-                <a:solidFill>
-                  <a:srgbClr val="FFFFFF"/>
-                </a:solidFill>
-              </a:defRPr>
-            </a:pPr>
-            <a:r>
-              <a:t>🔗 Access all paper resources</a:t>
+              <a:t>2 Papers Analyzed • Hybrid RAG + Multi-Model AI</a:t>
             </a:r>
           </a:p>
         </p:txBody>
@@ -3854,7 +3304,7 @@
               </a:defRPr>
             </a:pPr>
             <a:r>
-              <a:t>📊 Total Papers: 6</a:t>
+              <a:t>📊 Total Papers: 2</a:t>
             </a:r>
           </a:p>
           <a:p>
@@ -3869,7 +3319,7 @@
               </a:defRPr>
             </a:pPr>
             <a:r>
-              <a:t>⭐ Average Score: 0.9/100</a:t>
+              <a:t>⭐ Average Score: 91.5/100</a:t>
             </a:r>
           </a:p>
           <a:p>
@@ -3884,7 +3334,7 @@
               </a:defRPr>
             </a:pPr>
             <a:r>
-              <a:t>📱 Mobile Papers: 4</a:t>
+              <a:t>📱 Mobile Papers: 1</a:t>
             </a:r>
           </a:p>
           <a:p>
@@ -3899,7 +3349,7 @@
               </a:defRPr>
             </a:pPr>
             <a:r>
-              <a:t>💻 Laptop Papers: 1</a:t>
+              <a:t>💻 Laptop Papers: 0</a:t>
             </a:r>
           </a:p>
           <a:p>
@@ -3914,7 +3364,7 @@
               </a:defRPr>
             </a:pPr>
             <a:r>
-              <a:t>🔥 High Impact: 2 papers</a:t>
+              <a:t>🔥 High Impact: 1 papers</a:t>
             </a:r>
           </a:p>
         </p:txBody>
@@ -4029,51 +3479,6 @@
                 </a:solidFill>
               </a:defRPr>
             </a:pPr>
-            <a:r>
-              <a:t>   • INT8: 1 papers</a:t>
-            </a:r>
-          </a:p>
-          <a:p>
-            <a:pPr>
-              <a:spcBef>
-                <a:spcPts val="600"/>
-              </a:spcBef>
-              <a:defRPr sz="1800">
-                <a:solidFill>
-                  <a:srgbClr val="2D3748"/>
-                </a:solidFill>
-              </a:defRPr>
-            </a:pPr>
-            <a:r>
-              <a:t>   • Pruning: 1 papers</a:t>
-            </a:r>
-          </a:p>
-          <a:p>
-            <a:pPr>
-              <a:spcBef>
-                <a:spcPts val="600"/>
-              </a:spcBef>
-              <a:defRPr sz="1800">
-                <a:solidFill>
-                  <a:srgbClr val="2D3748"/>
-                </a:solidFill>
-              </a:defRPr>
-            </a:pPr>
-            <a:r>
-              <a:t>   • Distillation: 1 papers</a:t>
-            </a:r>
-          </a:p>
-          <a:p>
-            <a:pPr>
-              <a:spcBef>
-                <a:spcPts val="600"/>
-              </a:spcBef>
-              <a:defRPr sz="1800">
-                <a:solidFill>
-                  <a:srgbClr val="2D3748"/>
-                </a:solidFill>
-              </a:defRPr>
-            </a:pPr>
           </a:p>
           <a:p>
             <a:pPr>
@@ -4178,7 +3583,7 @@
               </a:defRPr>
             </a:pPr>
             <a:r>
-              <a:t>#1: INT8 Quantization: Achieving 4x Model Compression </a:t>
+              <a:t>#1: Efficient Quantization for Mobile LLMs</a:t>
             </a:r>
           </a:p>
         </p:txBody>
@@ -4233,7 +3638,7 @@
               </a:defRPr>
             </a:pPr>
             <a:r>
-              <a:t>Score: 0.98/100 | Platform: Mobile | Model: Transformer</a:t>
+              <a:t>Score: 95/100 | Platform: Mobile | Model: LLM</a:t>
             </a:r>
           </a:p>
           <a:p>
@@ -4290,7 +3695,7 @@
               </a:defRPr>
             </a:pPr>
             <a:r>
-              <a:t>INT8 reduces DRAM bandwidth by 75% with negligible accuracy loss</a:t>
+              <a:t>Uses 8-bit quantization to reduce DRAM by 75%</a:t>
             </a:r>
           </a:p>
           <a:p>
@@ -4332,7 +3737,7 @@
               </a:defRPr>
             </a:pPr>
             <a:r>
-              <a:t>Implement INT8 quantization for immediate 4x speedup in mobile</a:t>
+              <a:t>Quantization essential for mobile</a:t>
             </a:r>
           </a:p>
         </p:txBody>
@@ -4378,7 +3783,7 @@
               </a:defRPr>
             </a:pPr>
             <a:r>
-              <a:t>#2: On-Device LLM Inference: Techniques and Trade-offs</a:t>
+              <a:t>#2: Knowledge Distillation for Vision</a:t>
             </a:r>
           </a:p>
         </p:txBody>
@@ -4433,7 +3838,7 @@
               </a:defRPr>
             </a:pPr>
             <a:r>
-              <a:t>Score: 0.95/100 | Platform: Mobile | Model: LLM</a:t>
+              <a:t>Score: 88/100 | Platform: Both | Model: Vision</a:t>
             </a:r>
           </a:p>
           <a:p>
@@ -4448,7 +3853,7 @@
               </a:defRPr>
             </a:pPr>
             <a:r>
-              <a:t>DRAM Impact: High</a:t>
+              <a:t>DRAM Impact: Medium</a:t>
             </a:r>
           </a:p>
           <a:p>
@@ -4490,7 +3895,7 @@
               </a:defRPr>
             </a:pPr>
             <a:r>
-              <a:t>Batching and caching reduce inference latency by 60%</a:t>
+              <a:t>60% size reduction</a:t>
             </a:r>
           </a:p>
           <a:p>
@@ -4532,7 +3937,7 @@
               </a:defRPr>
             </a:pPr>
             <a:r>
-              <a:t>Implement aggressive batching and KV caching</a:t>
+              <a:t>Distillation works</a:t>
             </a:r>
           </a:p>
         </p:txBody>
@@ -4571,14 +3976,14 @@
           <a:lstStyle/>
           <a:p>
             <a:pPr>
-              <a:defRPr sz="3200">
+              <a:defRPr sz="4400">
                 <a:solidFill>
                   <a:srgbClr val="667EEA"/>
                 </a:solidFill>
               </a:defRPr>
             </a:pPr>
             <a:r>
-              <a:t>#3: Structured Pruning for Edge AI: A Comprehensive St</a:t>
+              <a:t>Research Trends</a:t>
             </a:r>
           </a:p>
         </p:txBody>
@@ -4608,8 +4013,8 @@
         </p:nvSpPr>
         <p:spPr>
           <a:xfrm>
-            <a:off x="457200" y="1371600"/>
-            <a:ext cx="8229600" cy="5029200"/>
+            <a:off x="457200" y="1645920"/>
+            <a:ext cx="8229600" cy="4572000"/>
           </a:xfrm>
           <a:prstGeom prst="rect">
             <a:avLst/>
@@ -4624,115 +4029,118 @@
           <a:p>
             <a:pPr>
               <a:spcBef>
-                <a:spcPts val="400"/>
+                <a:spcPts val="600"/>
               </a:spcBef>
-              <a:defRPr sz="1600" b="1">
+              <a:defRPr sz="1800">
                 <a:solidFill>
                   <a:srgbClr val="2D3748"/>
                 </a:solidFill>
               </a:defRPr>
             </a:pPr>
             <a:r>
-              <a:t>Score: 0.92/100 | Platform: Edge | Model: CNN</a:t>
+              <a:t>📈 Most Active Sources:</a:t>
             </a:r>
           </a:p>
           <a:p>
             <a:pPr>
               <a:spcBef>
-                <a:spcPts val="400"/>
+                <a:spcPts val="600"/>
               </a:spcBef>
-              <a:defRPr sz="1600">
+              <a:defRPr sz="1800">
                 <a:solidFill>
                   <a:srgbClr val="2D3748"/>
                 </a:solidFill>
               </a:defRPr>
             </a:pPr>
             <a:r>
-              <a:t>DRAM Impact: Medium</a:t>
+              <a:t>   • arXiv: 1 papers</a:t>
             </a:r>
           </a:p>
           <a:p>
             <a:pPr>
               <a:spcBef>
-                <a:spcPts val="400"/>
+                <a:spcPts val="600"/>
               </a:spcBef>
-              <a:defRPr sz="1600" b="1">
+              <a:defRPr sz="1800">
                 <a:solidFill>
                   <a:srgbClr val="2D3748"/>
                 </a:solidFill>
               </a:defRPr>
             </a:pPr>
+            <a:r>
+              <a:t>   • GitHub: 1 papers</a:t>
+            </a:r>
           </a:p>
           <a:p>
             <a:pPr>
               <a:spcBef>
-                <a:spcPts val="400"/>
+                <a:spcPts val="600"/>
               </a:spcBef>
-              <a:defRPr sz="1600">
+              <a:defRPr sz="1800">
                 <a:solidFill>
                   <a:srgbClr val="2D3748"/>
                 </a:solidFill>
               </a:defRPr>
             </a:pPr>
-            <a:r>
-              <a:t>💾 Memory Insight:</a:t>
-            </a:r>
           </a:p>
           <a:p>
             <a:pPr>
               <a:spcBef>
-                <a:spcPts val="400"/>
+                <a:spcPts val="600"/>
               </a:spcBef>
-              <a:defRPr sz="1600" b="1">
+              <a:defRPr sz="1800">
                 <a:solidFill>
                   <a:srgbClr val="2D3748"/>
                 </a:solidFill>
               </a:defRPr>
             </a:pPr>
             <a:r>
-              <a:t>Achieve 50% model sparsity with structured pruning</a:t>
+              <a:t>🔮 Emerging Patterns:</a:t>
             </a:r>
           </a:p>
           <a:p>
             <a:pPr>
               <a:spcBef>
-                <a:spcPts val="400"/>
+                <a:spcPts val="600"/>
               </a:spcBef>
-              <a:defRPr sz="1600">
+              <a:defRPr sz="1800">
                 <a:solidFill>
                   <a:srgbClr val="2D3748"/>
                 </a:solidFill>
               </a:defRPr>
             </a:pPr>
+            <a:r>
+              <a:t>   • Increasing focus on edge device optimization</a:t>
+            </a:r>
           </a:p>
           <a:p>
             <a:pPr>
               <a:spcBef>
-                <a:spcPts val="400"/>
+                <a:spcPts val="600"/>
               </a:spcBef>
-              <a:defRPr sz="1600" b="1">
+              <a:defRPr sz="1800">
                 <a:solidFill>
                   <a:srgbClr val="2D3748"/>
                 </a:solidFill>
               </a:defRPr>
             </a:pPr>
             <a:r>
-              <a:t>⚙️ Engineering Takeaway:</a:t>
+              <a:t>   • Memory efficiency is the top priority</a:t>
             </a:r>
           </a:p>
           <a:p>
             <a:pPr>
               <a:spcBef>
-                <a:spcPts val="400"/>
+                <a:spcPts val="600"/>
               </a:spcBef>
-              <a:defRPr sz="1600">
+              <a:defRPr sz="1800">
                 <a:solidFill>
                   <a:srgbClr val="2D3748"/>
                 </a:solidFill>
               </a:defRPr>
             </a:pPr>
             <a:r>
-              <a:t>Use fine-grained structured pruning for edge optimization</a:t>
+              <a:t>   • Cross-platform compatibility studies growing</a:t>
             </a:r>
           </a:p>
         </p:txBody>
@@ -4771,14 +4179,14 @@
           <a:lstStyle/>
           <a:p>
             <a:pPr>
-              <a:defRPr sz="3200">
+              <a:defRPr sz="4400">
                 <a:solidFill>
                   <a:srgbClr val="667EEA"/>
                 </a:solidFill>
               </a:defRPr>
             </a:pPr>
             <a:r>
-              <a:t>#4: Knowledge Distillation for Efficient Mobile Models</a:t>
+              <a:t>Sources (2 total)</a:t>
             </a:r>
           </a:p>
         </p:txBody>
@@ -4809,7 +4217,7 @@
         <p:spPr>
           <a:xfrm>
             <a:off x="457200" y="1371600"/>
-            <a:ext cx="8229600" cy="5029200"/>
+            <a:ext cx="4114800" cy="5029200"/>
           </a:xfrm>
           <a:prstGeom prst="rect">
             <a:avLst/>
@@ -4826,113 +4234,52 @@
               <a:spcBef>
                 <a:spcPts val="400"/>
               </a:spcBef>
-              <a:defRPr sz="1600" b="1">
+              <a:defRPr sz="1100">
                 <a:solidFill>
                   <a:srgbClr val="2D3748"/>
                 </a:solidFill>
               </a:defRPr>
             </a:pPr>
             <a:r>
-              <a:t>Score: 0.89/100 | Platform: Mobile | Model: BERT</a:t>
-            </a:r>
-          </a:p>
+              <a:t>1. Efficient Quantization for Mobile LLMs (arXiv) - 95</a:t>
+            </a:r>
+          </a:p>
+        </p:txBody>
+      </p:sp>
+      <p:sp>
+        <p:nvSpPr>
+          <p:cNvPr id="5" name="TextBox 4"/>
+          <p:cNvSpPr txBox="1"/>
+          <p:nvPr/>
+        </p:nvSpPr>
+        <p:spPr>
+          <a:xfrm>
+            <a:off x="4754880" y="1371600"/>
+            <a:ext cx="4114800" cy="5029200"/>
+          </a:xfrm>
+          <a:prstGeom prst="rect">
+            <a:avLst/>
+          </a:prstGeom>
+          <a:noFill/>
+        </p:spPr>
+        <p:txBody>
+          <a:bodyPr wrap="square">
+            <a:spAutoFit/>
+          </a:bodyPr>
+          <a:lstStyle/>
           <a:p>
             <a:pPr>
               <a:spcBef>
                 <a:spcPts val="400"/>
               </a:spcBef>
-              <a:defRPr sz="1600">
+              <a:defRPr sz="1100">
                 <a:solidFill>
                   <a:srgbClr val="2D3748"/>
                 </a:solidFill>
               </a:defRPr>
             </a:pPr>
             <a:r>
-              <a:t>DRAM Impact: Low</a:t>
-            </a:r>
-          </a:p>
-          <a:p>
-            <a:pPr>
-              <a:spcBef>
-                <a:spcPts val="400"/>
-              </a:spcBef>
-              <a:defRPr sz="1600" b="1">
-                <a:solidFill>
-                  <a:srgbClr val="2D3748"/>
-                </a:solidFill>
-              </a:defRPr>
-            </a:pPr>
-          </a:p>
-          <a:p>
-            <a:pPr>
-              <a:spcBef>
-                <a:spcPts val="400"/>
-              </a:spcBef>
-              <a:defRPr sz="1600">
-                <a:solidFill>
-                  <a:srgbClr val="2D3748"/>
-                </a:solidFill>
-              </a:defRPr>
-            </a:pPr>
-            <a:r>
-              <a:t>💾 Memory Insight:</a:t>
-            </a:r>
-          </a:p>
-          <a:p>
-            <a:pPr>
-              <a:spcBef>
-                <a:spcPts val="400"/>
-              </a:spcBef>
-              <a:defRPr sz="1600" b="1">
-                <a:solidFill>
-                  <a:srgbClr val="2D3748"/>
-                </a:solidFill>
-              </a:defRPr>
-            </a:pPr>
-            <a:r>
-              <a:t>Student models 6x smaller than teacher with 95% accuracy retention</a:t>
-            </a:r>
-          </a:p>
-          <a:p>
-            <a:pPr>
-              <a:spcBef>
-                <a:spcPts val="400"/>
-              </a:spcBef>
-              <a:defRPr sz="1600">
-                <a:solidFill>
-                  <a:srgbClr val="2D3748"/>
-                </a:solidFill>
-              </a:defRPr>
-            </a:pPr>
-          </a:p>
-          <a:p>
-            <a:pPr>
-              <a:spcBef>
-                <a:spcPts val="400"/>
-              </a:spcBef>
-              <a:defRPr sz="1600" b="1">
-                <a:solidFill>
-                  <a:srgbClr val="2D3748"/>
-                </a:solidFill>
-              </a:defRPr>
-            </a:pPr>
-            <a:r>
-              <a:t>⚙️ Engineering Takeaway:</a:t>
-            </a:r>
-          </a:p>
-          <a:p>
-            <a:pPr>
-              <a:spcBef>
-                <a:spcPts val="400"/>
-              </a:spcBef>
-              <a:defRPr sz="1600">
-                <a:solidFill>
-                  <a:srgbClr val="2D3748"/>
-                </a:solidFill>
-              </a:defRPr>
-            </a:pPr>
-            <a:r>
-              <a:t>Implement knowledge distillation pipelines in production</a:t>
+              <a:t>2. Knowledge Distillation for Vision (GitHub) - 88</a:t>
             </a:r>
           </a:p>
         </p:txBody>
@@ -4948,6 +4295,14 @@
 <file path=ppt/slides/slide8.xml><?xml version="1.0" encoding="utf-8"?>
 <p:sld xmlns:a="http://schemas.openxmlformats.org/drawingml/2006/main" xmlns:p="http://schemas.openxmlformats.org/presentationml/2006/main" xmlns:r="http://schemas.openxmlformats.org/officeDocument/2006/relationships">
   <p:cSld>
+    <p:bg>
+      <p:bgPr>
+        <a:solidFill>
+          <a:srgbClr val="764BA2"/>
+        </a:solidFill>
+        <a:effectLst/>
+      </p:bgPr>
+    </p:bg>
     <p:spTree>
       <p:nvGrpSpPr>
         <p:cNvPr id="1" name=""/>
@@ -4957,59 +4312,14 @@
       <p:grpSpPr/>
       <p:sp>
         <p:nvSpPr>
-          <p:cNvPr id="2" name="Title 1"/>
-          <p:cNvSpPr>
-            <a:spLocks noGrp="1"/>
-          </p:cNvSpPr>
-          <p:nvPr>
-            <p:ph type="title"/>
-          </p:nvPr>
-        </p:nvSpPr>
-        <p:spPr/>
-        <p:txBody>
-          <a:bodyPr/>
-          <a:lstStyle/>
-          <a:p>
-            <a:pPr>
-              <a:defRPr sz="3200">
-                <a:solidFill>
-                  <a:srgbClr val="667EEA"/>
-                </a:solidFill>
-              </a:defRPr>
-            </a:pPr>
-            <a:r>
-              <a:t>#5: Mixed Precision Training for Efficient Inference</a:t>
-            </a:r>
-          </a:p>
-        </p:txBody>
-      </p:sp>
-      <p:sp>
-        <p:nvSpPr>
-          <p:cNvPr id="3" name="Content Placeholder 2"/>
-          <p:cNvSpPr>
-            <a:spLocks noGrp="1"/>
-          </p:cNvSpPr>
-          <p:nvPr>
-            <p:ph idx="1"/>
-          </p:nvPr>
-        </p:nvSpPr>
-        <p:spPr/>
-        <p:txBody>
-          <a:bodyPr/>
-          <a:lstStyle/>
-          <a:p/>
-        </p:txBody>
-      </p:sp>
-      <p:sp>
-        <p:nvSpPr>
-          <p:cNvPr id="4" name="TextBox 3"/>
+          <p:cNvPr id="2" name="TextBox 1"/>
           <p:cNvSpPr txBox="1"/>
           <p:nvPr/>
         </p:nvSpPr>
         <p:spPr>
           <a:xfrm>
-            <a:off x="457200" y="1371600"/>
-            <a:ext cx="8229600" cy="5029200"/>
+            <a:off x="457200" y="1828800"/>
+            <a:ext cx="8229600" cy="1371600"/>
           </a:xfrm>
           <a:prstGeom prst="rect">
             <a:avLst/>
@@ -5017,199 +4327,34 @@
           <a:noFill/>
         </p:spPr>
         <p:txBody>
-          <a:bodyPr wrap="square">
+          <a:bodyPr wrap="none">
             <a:spAutoFit/>
           </a:bodyPr>
           <a:lstStyle/>
           <a:p>
             <a:pPr>
-              <a:spcBef>
-                <a:spcPts val="400"/>
-              </a:spcBef>
-              <a:defRPr sz="1600" b="1">
-                <a:solidFill>
-                  <a:srgbClr val="2D3748"/>
-                </a:solidFill>
-              </a:defRPr>
-            </a:pPr>
-            <a:r>
-              <a:t>Score: 0.88/100 | Platform: Laptop | Model: ResNet</a:t>
-            </a:r>
-          </a:p>
-          <a:p>
-            <a:pPr>
-              <a:spcBef>
-                <a:spcPts val="400"/>
-              </a:spcBef>
-              <a:defRPr sz="1600">
-                <a:solidFill>
-                  <a:srgbClr val="2D3748"/>
-                </a:solidFill>
-              </a:defRPr>
-            </a:pPr>
-            <a:r>
-              <a:t>DRAM Impact: Medium</a:t>
-            </a:r>
-          </a:p>
-          <a:p>
-            <a:pPr>
-              <a:spcBef>
-                <a:spcPts val="400"/>
-              </a:spcBef>
-              <a:defRPr sz="1600" b="1">
-                <a:solidFill>
-                  <a:srgbClr val="2D3748"/>
-                </a:solidFill>
-              </a:defRPr>
-            </a:pPr>
-          </a:p>
-          <a:p>
-            <a:pPr>
-              <a:spcBef>
-                <a:spcPts val="400"/>
-              </a:spcBef>
-              <a:defRPr sz="1600">
-                <a:solidFill>
-                  <a:srgbClr val="2D3748"/>
-                </a:solidFill>
-              </a:defRPr>
-            </a:pPr>
-            <a:r>
-              <a:t>💾 Memory Insight:</a:t>
-            </a:r>
-          </a:p>
-          <a:p>
-            <a:pPr>
-              <a:spcBef>
-                <a:spcPts val="400"/>
-              </a:spcBef>
-              <a:defRPr sz="1600" b="1">
-                <a:solidFill>
-                  <a:srgbClr val="2D3748"/>
-                </a:solidFill>
-              </a:defRPr>
-            </a:pPr>
-            <a:r>
-              <a:t>Mixed precision reduces memory consumption by 40%</a:t>
-            </a:r>
-          </a:p>
-          <a:p>
-            <a:pPr>
-              <a:spcBef>
-                <a:spcPts val="400"/>
-              </a:spcBef>
-              <a:defRPr sz="1600">
-                <a:solidFill>
-                  <a:srgbClr val="2D3748"/>
-                </a:solidFill>
-              </a:defRPr>
-            </a:pPr>
-          </a:p>
-          <a:p>
-            <a:pPr>
-              <a:spcBef>
-                <a:spcPts val="400"/>
-              </a:spcBef>
-              <a:defRPr sz="1600" b="1">
-                <a:solidFill>
-                  <a:srgbClr val="2D3748"/>
-                </a:solidFill>
-              </a:defRPr>
-            </a:pPr>
-            <a:r>
-              <a:t>⚙️ Engineering Takeaway:</a:t>
-            </a:r>
-          </a:p>
-          <a:p>
-            <a:pPr>
-              <a:spcBef>
-                <a:spcPts val="400"/>
-              </a:spcBef>
-              <a:defRPr sz="1600">
-                <a:solidFill>
-                  <a:srgbClr val="2D3748"/>
-                </a:solidFill>
-              </a:defRPr>
-            </a:pPr>
-            <a:r>
-              <a:t>Use mixed precision for training and inference</a:t>
-            </a:r>
-          </a:p>
-        </p:txBody>
-      </p:sp>
-    </p:spTree>
-  </p:cSld>
-  <p:clrMapOvr>
-    <a:masterClrMapping/>
-  </p:clrMapOvr>
-</p:sld>
-</file>
-
-<file path=ppt/slides/slide9.xml><?xml version="1.0" encoding="utf-8"?>
-<p:sld xmlns:a="http://schemas.openxmlformats.org/drawingml/2006/main" xmlns:p="http://schemas.openxmlformats.org/presentationml/2006/main" xmlns:r="http://schemas.openxmlformats.org/officeDocument/2006/relationships">
-  <p:cSld>
-    <p:spTree>
-      <p:nvGrpSpPr>
-        <p:cNvPr id="1" name=""/>
-        <p:cNvGrpSpPr/>
-        <p:nvPr/>
-      </p:nvGrpSpPr>
-      <p:grpSpPr/>
-      <p:sp>
-        <p:nvSpPr>
-          <p:cNvPr id="2" name="Title 1"/>
-          <p:cNvSpPr>
-            <a:spLocks noGrp="1"/>
-          </p:cNvSpPr>
-          <p:nvPr>
-            <p:ph type="title"/>
-          </p:nvPr>
-        </p:nvSpPr>
-        <p:spPr/>
-        <p:txBody>
-          <a:bodyPr/>
-          <a:lstStyle/>
-          <a:p>
-            <a:pPr>
-              <a:defRPr sz="3200">
-                <a:solidFill>
-                  <a:srgbClr val="667EEA"/>
-                </a:solidFill>
-              </a:defRPr>
-            </a:pPr>
-            <a:r>
-              <a:t>#6: Neural Architecture Search for Efficient Mobile Mo</a:t>
-            </a:r>
-          </a:p>
-        </p:txBody>
-      </p:sp>
-      <p:sp>
-        <p:nvSpPr>
-          <p:cNvPr id="3" name="Content Placeholder 2"/>
-          <p:cNvSpPr>
-            <a:spLocks noGrp="1"/>
-          </p:cNvSpPr>
-          <p:nvPr>
-            <p:ph idx="1"/>
-          </p:nvPr>
-        </p:nvSpPr>
-        <p:spPr/>
-        <p:txBody>
-          <a:bodyPr/>
-          <a:lstStyle/>
-          <a:p/>
-        </p:txBody>
-      </p:sp>
-      <p:sp>
-        <p:nvSpPr>
-          <p:cNvPr id="4" name="TextBox 3"/>
+              <a:defRPr sz="5400" b="1">
+                <a:solidFill>
+                  <a:srgbClr val="FFFFFF"/>
+                </a:solidFill>
+              </a:defRPr>
+            </a:pPr>
+            <a:r>
+              <a:t>Next Steps</a:t>
+            </a:r>
+          </a:p>
+        </p:txBody>
+      </p:sp>
+      <p:sp>
+        <p:nvSpPr>
+          <p:cNvPr id="3" name="TextBox 2"/>
           <p:cNvSpPr txBox="1"/>
           <p:nvPr/>
         </p:nvSpPr>
         <p:spPr>
           <a:xfrm>
-            <a:off x="457200" y="1371600"/>
-            <a:ext cx="8229600" cy="5029200"/>
+            <a:off x="457200" y="3474720"/>
+            <a:ext cx="8229600" cy="2743200"/>
           </a:xfrm>
           <a:prstGeom prst="rect">
             <a:avLst/>
@@ -5224,115 +4369,61 @@
           <a:p>
             <a:pPr>
               <a:spcBef>
-                <a:spcPts val="400"/>
+                <a:spcPts val="1000"/>
               </a:spcBef>
-              <a:defRPr sz="1600" b="1">
-                <a:solidFill>
-                  <a:srgbClr val="2D3748"/>
-                </a:solidFill>
-              </a:defRPr>
-            </a:pPr>
-            <a:r>
-              <a:t>Score: 0.86/100 | Platform: Mobile | Model: MobileNet</a:t>
+              <a:defRPr sz="2000">
+                <a:solidFill>
+                  <a:srgbClr val="FFFFFF"/>
+                </a:solidFill>
+              </a:defRPr>
+            </a:pPr>
+            <a:r>
+              <a:t>📄 Download the full PDF report</a:t>
             </a:r>
           </a:p>
           <a:p>
             <a:pPr>
               <a:spcBef>
-                <a:spcPts val="400"/>
+                <a:spcPts val="1000"/>
               </a:spcBef>
-              <a:defRPr sz="1600">
-                <a:solidFill>
-                  <a:srgbClr val="2D3748"/>
-                </a:solidFill>
-              </a:defRPr>
-            </a:pPr>
-            <a:r>
-              <a:t>DRAM Impact: Medium</a:t>
+              <a:defRPr sz="2000">
+                <a:solidFill>
+                  <a:srgbClr val="FFFFFF"/>
+                </a:solidFill>
+              </a:defRPr>
+            </a:pPr>
+            <a:r>
+              <a:t>🎤 Listen to the audio podcast</a:t>
             </a:r>
           </a:p>
           <a:p>
             <a:pPr>
               <a:spcBef>
-                <a:spcPts val="400"/>
+                <a:spcPts val="1000"/>
               </a:spcBef>
-              <a:defRPr sz="1600" b="1">
-                <a:solidFill>
-                  <a:srgbClr val="2D3748"/>
-                </a:solidFill>
-              </a:defRPr>
-            </a:pPr>
+              <a:defRPr sz="2000">
+                <a:solidFill>
+                  <a:srgbClr val="FFFFFF"/>
+                </a:solidFill>
+              </a:defRPr>
+            </a:pPr>
+            <a:r>
+              <a:t>📊 View detailed analysis dashboard</a:t>
+            </a:r>
           </a:p>
           <a:p>
             <a:pPr>
               <a:spcBef>
-                <a:spcPts val="400"/>
+                <a:spcPts val="1000"/>
               </a:spcBef>
-              <a:defRPr sz="1600">
-                <a:solidFill>
-                  <a:srgbClr val="2D3748"/>
-                </a:solidFill>
-              </a:defRPr>
-            </a:pPr>
-            <a:r>
-              <a:t>💾 Memory Insight:</a:t>
-            </a:r>
-          </a:p>
-          <a:p>
-            <a:pPr>
-              <a:spcBef>
-                <a:spcPts val="400"/>
-              </a:spcBef>
-              <a:defRPr sz="1600" b="1">
-                <a:solidFill>
-                  <a:srgbClr val="2D3748"/>
-                </a:solidFill>
-              </a:defRPr>
-            </a:pPr>
-            <a:r>
-              <a:t>NAS-discovered models are 40% smaller than hand-designed</a:t>
-            </a:r>
-          </a:p>
-          <a:p>
-            <a:pPr>
-              <a:spcBef>
-                <a:spcPts val="400"/>
-              </a:spcBef>
-              <a:defRPr sz="1600">
-                <a:solidFill>
-                  <a:srgbClr val="2D3748"/>
-                </a:solidFill>
-              </a:defRPr>
-            </a:pPr>
-          </a:p>
-          <a:p>
-            <a:pPr>
-              <a:spcBef>
-                <a:spcPts val="400"/>
-              </a:spcBef>
-              <a:defRPr sz="1600" b="1">
-                <a:solidFill>
-                  <a:srgbClr val="2D3748"/>
-                </a:solidFill>
-              </a:defRPr>
-            </a:pPr>
-            <a:r>
-              <a:t>⚙️ Engineering Takeaway:</a:t>
-            </a:r>
-          </a:p>
-          <a:p>
-            <a:pPr>
-              <a:spcBef>
-                <a:spcPts val="400"/>
-              </a:spcBef>
-              <a:defRPr sz="1600">
-                <a:solidFill>
-                  <a:srgbClr val="2D3748"/>
-                </a:solidFill>
-              </a:defRPr>
-            </a:pPr>
-            <a:r>
-              <a:t>Deploy NAS-discovered architectures for efficiency</a:t>
+              <a:defRPr sz="2000">
+                <a:solidFill>
+                  <a:srgbClr val="FFFFFF"/>
+                </a:solidFill>
+              </a:defRPr>
+            </a:pPr>
+            <a:r>
+              <a:t>🔗 Access all paper resources</a:t>
             </a:r>
           </a:p>
         </p:txBody>
